--- a/curso/pptx/S13.pptx
+++ b/curso/pptx/S13.pptx
@@ -3891,8 +3891,8 @@
         </p:nvSpPr>
         <p:spPr>
           <a:xfrm>
-            <a:off x="640000" y="420000"/>
-            <a:ext cx="10912000" cy="420000"/>
+            <a:off x="10652000" y="380000"/>
+            <a:ext cx="900000" cy="800000"/>
           </a:xfrm>
           <a:prstGeom prst="rect">
             <a:avLst/>
@@ -3907,17 +3907,17 @@
           <a:p>
             <a:pPr>
               <a:spcAft>
-                <a:spcPts val="810"/>
+                <a:spcPts val="1980"/>
               </a:spcAft>
             </a:pPr>
             <a:r>
-              <a:rPr sz="1800" b="1">
+              <a:rPr sz="4400" b="0">
                 <a:solidFill>
                   <a:srgbClr val="1F2A44"/>
                 </a:solidFill>
                 <a:latin typeface="Nunito Sans"/>
               </a:rPr>
-              <a:t>🦉 Aula de Filosofía</a:t>
+              <a:t>🙃</a:t>
             </a:r>
           </a:p>
         </p:txBody>

--- a/curso/pptx/S13.pptx
+++ b/curso/pptx/S13.pptx
@@ -472,426 +472,6 @@
     </a:lvl9pPr>
   </p:notesStyle>
 </p:notesMaster>
-</file>
-
-<file path=ppt/notesSlides/notesSlide1.xml><?xml version="1.0" encoding="utf-8"?>
-<p:notes xmlns:a="http://schemas.openxmlformats.org/drawingml/2006/main" xmlns:p="http://schemas.openxmlformats.org/presentationml/2006/main" xmlns:r="http://schemas.openxmlformats.org/officeDocument/2006/relationships">
-  <p:cSld>
-    <p:spTree>
-      <p:nvGrpSpPr>
-        <p:cNvPr id="1" name=""/>
-        <p:cNvGrpSpPr/>
-        <p:nvPr/>
-      </p:nvGrpSpPr>
-      <p:grpSpPr>
-        <a:xfrm>
-          <a:off x="0" y="0"/>
-          <a:ext cx="0" cy="0"/>
-          <a:chOff x="0" y="0"/>
-          <a:chExt cx="0" cy="0"/>
-        </a:xfrm>
-      </p:grpSpPr>
-      <p:sp>
-        <p:nvSpPr>
-          <p:cNvPr id="2" name="Slide Image Placeholder 1"/>
-          <p:cNvSpPr>
-            <a:spLocks noGrp="1"/>
-          </p:cNvSpPr>
-          <p:nvPr>
-            <p:ph type="sldImg" idx="2"/>
-          </p:nvPr>
-        </p:nvSpPr>
-        <p:spPr/>
-      </p:sp>
-      <p:sp>
-        <p:nvSpPr>
-          <p:cNvPr id="3" name="Notes Placeholder 2"/>
-          <p:cNvSpPr>
-            <a:spLocks noGrp="1"/>
-          </p:cNvSpPr>
-          <p:nvPr>
-            <p:ph type="body" idx="3" sz="quarter"/>
-          </p:nvPr>
-        </p:nvSpPr>
-        <p:spPr/>
-        <p:txBody>
-          <a:bodyPr/>
-          <a:lstStyle/>
-          <a:p>
-            <a:r>
-              <a:t>3 minutos. Sin apuntes. Es para recordar, no cuenta para nota.</a:t>
-            </a:r>
-          </a:p>
-        </p:txBody>
-      </p:sp>
-      <p:sp>
-        <p:nvSpPr>
-          <p:cNvPr id="4" name="Slide Number Placeholder 3"/>
-          <p:cNvSpPr>
-            <a:spLocks noGrp="1"/>
-          </p:cNvSpPr>
-          <p:nvPr>
-            <p:ph type="sldNum" idx="5" sz="quarter"/>
-          </p:nvPr>
-        </p:nvSpPr>
-        <p:spPr/>
-      </p:sp>
-    </p:spTree>
-  </p:cSld>
-  <p:clrMapOvr>
-    <a:masterClrMapping/>
-  </p:clrMapOvr>
-</p:notes>
-</file>
-
-<file path=ppt/notesSlides/notesSlide2.xml><?xml version="1.0" encoding="utf-8"?>
-<p:notes xmlns:a="http://schemas.openxmlformats.org/drawingml/2006/main" xmlns:p="http://schemas.openxmlformats.org/presentationml/2006/main" xmlns:r="http://schemas.openxmlformats.org/officeDocument/2006/relationships">
-  <p:cSld>
-    <p:spTree>
-      <p:nvGrpSpPr>
-        <p:cNvPr id="1" name=""/>
-        <p:cNvGrpSpPr/>
-        <p:nvPr/>
-      </p:nvGrpSpPr>
-      <p:grpSpPr>
-        <a:xfrm>
-          <a:off x="0" y="0"/>
-          <a:ext cx="0" cy="0"/>
-          <a:chOff x="0" y="0"/>
-          <a:chExt cx="0" cy="0"/>
-        </a:xfrm>
-      </p:grpSpPr>
-      <p:sp>
-        <p:nvSpPr>
-          <p:cNvPr id="2" name="Slide Image Placeholder 1"/>
-          <p:cNvSpPr>
-            <a:spLocks noGrp="1"/>
-          </p:cNvSpPr>
-          <p:nvPr>
-            <p:ph type="sldImg" idx="2"/>
-          </p:nvPr>
-        </p:nvSpPr>
-        <p:spPr/>
-      </p:sp>
-      <p:sp>
-        <p:nvSpPr>
-          <p:cNvPr id="3" name="Notes Placeholder 2"/>
-          <p:cNvSpPr>
-            <a:spLocks noGrp="1"/>
-          </p:cNvSpPr>
-          <p:nvPr>
-            <p:ph type="body" idx="3" sz="quarter"/>
-          </p:nvPr>
-        </p:nvSpPr>
-        <p:spPr/>
-        <p:txBody>
-          <a:bodyPr/>
-          <a:lstStyle/>
-          <a:p>
-            <a:r>
-              <a:t>3 minutos. Sin apuntes. Es para recordar, no cuenta para nota.</a:t>
-            </a:r>
-          </a:p>
-        </p:txBody>
-      </p:sp>
-      <p:sp>
-        <p:nvSpPr>
-          <p:cNvPr id="4" name="Slide Number Placeholder 3"/>
-          <p:cNvSpPr>
-            <a:spLocks noGrp="1"/>
-          </p:cNvSpPr>
-          <p:nvPr>
-            <p:ph type="sldNum" idx="5" sz="quarter"/>
-          </p:nvPr>
-        </p:nvSpPr>
-        <p:spPr/>
-      </p:sp>
-    </p:spTree>
-  </p:cSld>
-  <p:clrMapOvr>
-    <a:masterClrMapping/>
-  </p:clrMapOvr>
-</p:notes>
-</file>
-
-<file path=ppt/notesSlides/notesSlide3.xml><?xml version="1.0" encoding="utf-8"?>
-<p:notes xmlns:a="http://schemas.openxmlformats.org/drawingml/2006/main" xmlns:p="http://schemas.openxmlformats.org/presentationml/2006/main" xmlns:r="http://schemas.openxmlformats.org/officeDocument/2006/relationships">
-  <p:cSld>
-    <p:spTree>
-      <p:nvGrpSpPr>
-        <p:cNvPr id="1" name=""/>
-        <p:cNvGrpSpPr/>
-        <p:nvPr/>
-      </p:nvGrpSpPr>
-      <p:grpSpPr>
-        <a:xfrm>
-          <a:off x="0" y="0"/>
-          <a:ext cx="0" cy="0"/>
-          <a:chOff x="0" y="0"/>
-          <a:chExt cx="0" cy="0"/>
-        </a:xfrm>
-      </p:grpSpPr>
-      <p:sp>
-        <p:nvSpPr>
-          <p:cNvPr id="2" name="Slide Image Placeholder 1"/>
-          <p:cNvSpPr>
-            <a:spLocks noGrp="1"/>
-          </p:cNvSpPr>
-          <p:nvPr>
-            <p:ph type="sldImg" idx="2"/>
-          </p:nvPr>
-        </p:nvSpPr>
-        <p:spPr/>
-      </p:sp>
-      <p:sp>
-        <p:nvSpPr>
-          <p:cNvPr id="3" name="Notes Placeholder 2"/>
-          <p:cNvSpPr>
-            <a:spLocks noGrp="1"/>
-          </p:cNvSpPr>
-          <p:nvPr>
-            <p:ph type="body" idx="3" sz="quarter"/>
-          </p:nvPr>
-        </p:nvSpPr>
-        <p:spPr/>
-        <p:txBody>
-          <a:bodyPr/>
-          <a:lstStyle/>
-          <a:p>
-            <a:r>
-              <a:t>Nadie tiene que contestar: solo pensarlo.</a:t>
-            </a:r>
-          </a:p>
-        </p:txBody>
-      </p:sp>
-      <p:sp>
-        <p:nvSpPr>
-          <p:cNvPr id="4" name="Slide Number Placeholder 3"/>
-          <p:cNvSpPr>
-            <a:spLocks noGrp="1"/>
-          </p:cNvSpPr>
-          <p:nvPr>
-            <p:ph type="sldNum" idx="5" sz="quarter"/>
-          </p:nvPr>
-        </p:nvSpPr>
-        <p:spPr/>
-      </p:sp>
-    </p:spTree>
-  </p:cSld>
-  <p:clrMapOvr>
-    <a:masterClrMapping/>
-  </p:clrMapOvr>
-</p:notes>
-</file>
-
-<file path=ppt/notesSlides/notesSlide4.xml><?xml version="1.0" encoding="utf-8"?>
-<p:notes xmlns:a="http://schemas.openxmlformats.org/drawingml/2006/main" xmlns:p="http://schemas.openxmlformats.org/presentationml/2006/main" xmlns:r="http://schemas.openxmlformats.org/officeDocument/2006/relationships">
-  <p:cSld>
-    <p:spTree>
-      <p:nvGrpSpPr>
-        <p:cNvPr id="1" name=""/>
-        <p:cNvGrpSpPr/>
-        <p:nvPr/>
-      </p:nvGrpSpPr>
-      <p:grpSpPr>
-        <a:xfrm>
-          <a:off x="0" y="0"/>
-          <a:ext cx="0" cy="0"/>
-          <a:chOff x="0" y="0"/>
-          <a:chExt cx="0" cy="0"/>
-        </a:xfrm>
-      </p:grpSpPr>
-      <p:sp>
-        <p:nvSpPr>
-          <p:cNvPr id="2" name="Slide Image Placeholder 1"/>
-          <p:cNvSpPr>
-            <a:spLocks noGrp="1"/>
-          </p:cNvSpPr>
-          <p:nvPr>
-            <p:ph type="sldImg" idx="2"/>
-          </p:nvPr>
-        </p:nvSpPr>
-        <p:spPr/>
-      </p:sp>
-      <p:sp>
-        <p:nvSpPr>
-          <p:cNvPr id="3" name="Notes Placeholder 2"/>
-          <p:cNvSpPr>
-            <a:spLocks noGrp="1"/>
-          </p:cNvSpPr>
-          <p:nvPr>
-            <p:ph type="body" idx="3" sz="quarter"/>
-          </p:nvPr>
-        </p:nvSpPr>
-        <p:spPr/>
-        <p:txBody>
-          <a:bodyPr/>
-          <a:lstStyle/>
-          <a:p>
-            <a:r>
-              <a:t>Dejar unos segundos para que piensen la respuesta fácil antes de enseñar los pasos.</a:t>
-            </a:r>
-          </a:p>
-        </p:txBody>
-      </p:sp>
-      <p:sp>
-        <p:nvSpPr>
-          <p:cNvPr id="4" name="Slide Number Placeholder 3"/>
-          <p:cNvSpPr>
-            <a:spLocks noGrp="1"/>
-          </p:cNvSpPr>
-          <p:nvPr>
-            <p:ph type="sldNum" idx="5" sz="quarter"/>
-          </p:nvPr>
-        </p:nvSpPr>
-        <p:spPr/>
-      </p:sp>
-    </p:spTree>
-  </p:cSld>
-  <p:clrMapOvr>
-    <a:masterClrMapping/>
-  </p:clrMapOvr>
-</p:notes>
-</file>
-
-<file path=ppt/notesSlides/notesSlide5.xml><?xml version="1.0" encoding="utf-8"?>
-<p:notes xmlns:a="http://schemas.openxmlformats.org/drawingml/2006/main" xmlns:p="http://schemas.openxmlformats.org/presentationml/2006/main" xmlns:r="http://schemas.openxmlformats.org/officeDocument/2006/relationships">
-  <p:cSld>
-    <p:spTree>
-      <p:nvGrpSpPr>
-        <p:cNvPr id="1" name=""/>
-        <p:cNvGrpSpPr/>
-        <p:nvPr/>
-      </p:nvGrpSpPr>
-      <p:grpSpPr>
-        <a:xfrm>
-          <a:off x="0" y="0"/>
-          <a:ext cx="0" cy="0"/>
-          <a:chOff x="0" y="0"/>
-          <a:chExt cx="0" cy="0"/>
-        </a:xfrm>
-      </p:grpSpPr>
-      <p:sp>
-        <p:nvSpPr>
-          <p:cNvPr id="2" name="Slide Image Placeholder 1"/>
-          <p:cNvSpPr>
-            <a:spLocks noGrp="1"/>
-          </p:cNvSpPr>
-          <p:nvPr>
-            <p:ph type="sldImg" idx="2"/>
-          </p:nvPr>
-        </p:nvSpPr>
-        <p:spPr/>
-      </p:sp>
-      <p:sp>
-        <p:nvSpPr>
-          <p:cNvPr id="3" name="Notes Placeholder 2"/>
-          <p:cNvSpPr>
-            <a:spLocks noGrp="1"/>
-          </p:cNvSpPr>
-          <p:nvPr>
-            <p:ph type="body" idx="3" sz="quarter"/>
-          </p:nvPr>
-        </p:nvSpPr>
-        <p:spPr/>
-        <p:txBody>
-          <a:bodyPr/>
-          <a:lstStyle/>
-          <a:p>
-            <a:r>
-              <a:t>Dejar 2 minutos para que lo escriban. La diapositiva siguiente muestra el resumen.</a:t>
-            </a:r>
-          </a:p>
-        </p:txBody>
-      </p:sp>
-      <p:sp>
-        <p:nvSpPr>
-          <p:cNvPr id="4" name="Slide Number Placeholder 3"/>
-          <p:cNvSpPr>
-            <a:spLocks noGrp="1"/>
-          </p:cNvSpPr>
-          <p:nvPr>
-            <p:ph type="sldNum" idx="5" sz="quarter"/>
-          </p:nvPr>
-        </p:nvSpPr>
-        <p:spPr/>
-      </p:sp>
-    </p:spTree>
-  </p:cSld>
-  <p:clrMapOvr>
-    <a:masterClrMapping/>
-  </p:clrMapOvr>
-</p:notes>
-</file>
-
-<file path=ppt/notesSlides/notesSlide6.xml><?xml version="1.0" encoding="utf-8"?>
-<p:notes xmlns:a="http://schemas.openxmlformats.org/drawingml/2006/main" xmlns:p="http://schemas.openxmlformats.org/presentationml/2006/main" xmlns:r="http://schemas.openxmlformats.org/officeDocument/2006/relationships">
-  <p:cSld>
-    <p:spTree>
-      <p:nvGrpSpPr>
-        <p:cNvPr id="1" name=""/>
-        <p:cNvGrpSpPr/>
-        <p:nvPr/>
-      </p:nvGrpSpPr>
-      <p:grpSpPr>
-        <a:xfrm>
-          <a:off x="0" y="0"/>
-          <a:ext cx="0" cy="0"/>
-          <a:chOff x="0" y="0"/>
-          <a:chExt cx="0" cy="0"/>
-        </a:xfrm>
-      </p:grpSpPr>
-      <p:sp>
-        <p:nvSpPr>
-          <p:cNvPr id="2" name="Slide Image Placeholder 1"/>
-          <p:cNvSpPr>
-            <a:spLocks noGrp="1"/>
-          </p:cNvSpPr>
-          <p:nvPr>
-            <p:ph type="sldImg" idx="2"/>
-          </p:nvPr>
-        </p:nvSpPr>
-        <p:spPr/>
-      </p:sp>
-      <p:sp>
-        <p:nvSpPr>
-          <p:cNvPr id="3" name="Notes Placeholder 2"/>
-          <p:cNvSpPr>
-            <a:spLocks noGrp="1"/>
-          </p:cNvSpPr>
-          <p:nvPr>
-            <p:ph type="body" idx="3" sz="quarter"/>
-          </p:nvPr>
-        </p:nvSpPr>
-        <p:spPr/>
-        <p:txBody>
-          <a:bodyPr/>
-          <a:lstStyle/>
-          <a:p>
-            <a:r>
-              <a:t>Buscar: «qué es una falacia» · «falacias lógicas ejemplos»</a:t>
-            </a:r>
-          </a:p>
-        </p:txBody>
-      </p:sp>
-      <p:sp>
-        <p:nvSpPr>
-          <p:cNvPr id="4" name="Slide Number Placeholder 3"/>
-          <p:cNvSpPr>
-            <a:spLocks noGrp="1"/>
-          </p:cNvSpPr>
-          <p:nvPr>
-            <p:ph type="sldNum" idx="5" sz="quarter"/>
-          </p:nvPr>
-        </p:nvSpPr>
-        <p:spPr/>
-      </p:sp>
-    </p:spTree>
-  </p:cSld>
-  <p:clrMapOvr>
-    <a:masterClrMapping/>
-  </p:clrMapOvr>
-</p:notes>
 </file>
 
 <file path=ppt/slideLayouts/slideLayout1.xml><?xml version="1.0" encoding="utf-8"?>

--- a/curso/pptx/S13.pptx
+++ b/curso/pptx/S13.pptx
@@ -4109,7 +4109,7 @@
                 </a:solidFill>
                 <a:latin typeface="Nunito Sans"/>
               </a:rPr>
-              <a:t>Naiara: «Hoy me llevo el paraguas porque la app del tiempo da un 90 % de lluvia y el cielo está negro.»</a:t>
+              <a:t>Una chica: «Hoy me llevo el paraguas porque la app del tiempo da un 90 % de lluvia y el cielo está negro.»</a:t>
             </a:r>
           </a:p>
         </p:txBody>
@@ -4796,7 +4796,7 @@
                 </a:solidFill>
                 <a:latin typeface="Nunito Sans"/>
               </a:rPr>
-              <a:t>Aitor: «Fumar es malo para la salud. Lo sé porque lo dice mi youtuber de videojuegos favorito».</a:t>
+              <a:t>Un chico: «Fumar es malo para la salud. Lo sé porque lo dice mi youtuber de videojuegos favorito».</a:t>
             </a:r>
           </a:p>
         </p:txBody>

--- a/curso/pptx/S13.pptx
+++ b/curso/pptx/S13.pptx
@@ -3536,7 +3536,7 @@
                 </a:solidFill>
                 <a:latin typeface="Nunito Sans"/>
               </a:rPr>
-              <a:t>PENSAMIENTO CRÍTICO · SESIÓN 13 · UNIDAD 3 · FALACIAS I: ATACAR, DESVIAR, EMOCIONAR</a:t>
+              <a:t>PENSAMIENTO CRÍTICO · SESIÓN 13 · UNIDAD 3 · ARGUMENTAR</a:t>
             </a:r>
           </a:p>
         </p:txBody>
@@ -3575,7 +3575,7 @@
                 </a:solidFill>
                 <a:latin typeface="Fredoka"/>
               </a:rPr>
-              <a:t>¿Qué es una falacia?</a:t>
+              <a:t>¿Qué es un argumento?</a:t>
             </a:r>
           </a:p>
         </p:txBody>
@@ -3614,7 +3614,7 @@
                 </a:solidFill>
                 <a:latin typeface="Nunito Sans"/>
               </a:rPr>
-              <a:t>Una falacia es un argumento que parece bueno pero no lo es: sus razones no sostienen la conclusión.</a:t>
+              <a:t>Un argumento es una conclusión apoyada en premisas; palabras como «porque» o «por tanto» ayudan a encontrar cada parte.</a:t>
             </a:r>
           </a:p>
         </p:txBody>
@@ -3633,7 +3633,7 @@
     <p:bg>
       <p:bgPr>
         <a:solidFill>
-          <a:srgbClr val="FBF7EF"/>
+          <a:srgbClr val="1F2A44"/>
         </a:solidFill>
         <a:effectLst/>
       </p:bgPr>
@@ -3653,8 +3653,8 @@
         </p:nvSpPr>
         <p:spPr>
           <a:xfrm>
-            <a:off x="640000" y="380000"/>
-            <a:ext cx="10912000" cy="420000"/>
+            <a:off x="640000" y="2300000"/>
+            <a:ext cx="10912000" cy="500000"/>
           </a:xfrm>
           <a:prstGeom prst="rect">
             <a:avLst/>
@@ -3669,17 +3669,17 @@
           <a:p>
             <a:pPr>
               <a:spcAft>
-                <a:spcPts val="630"/>
-              </a:spcAft>
-            </a:pPr>
-            <a:r>
-              <a:rPr sz="1400" b="1">
-                <a:solidFill>
-                  <a:srgbClr val="E8793A"/>
-                </a:solidFill>
-                <a:latin typeface="Nunito Sans"/>
-              </a:rPr>
-              <a:t>BLOQUE 2 · CASOS RESUELTOS</a:t>
+                <a:spcPts val="810"/>
+              </a:spcAft>
+            </a:pPr>
+            <a:r>
+              <a:rPr sz="1800" b="1">
+                <a:solidFill>
+                  <a:srgbClr val="F4B183"/>
+                </a:solidFill>
+                <a:latin typeface="Nunito Sans"/>
+              </a:rPr>
+              <a:t>BLOQUE 2</a:t>
             </a:r>
           </a:p>
         </p:txBody>
@@ -3692,7 +3692,7 @@
         </p:nvSpPr>
         <p:spPr>
           <a:xfrm>
-            <a:off x="640000" y="760000"/>
+            <a:off x="640000" y="2800000"/>
             <a:ext cx="10912000" cy="800000"/>
           </a:xfrm>
           <a:prstGeom prst="rect">
@@ -3708,222 +3708,17 @@
           <a:p>
             <a:pPr>
               <a:spcAft>
-                <a:spcPts val="1710"/>
-              </a:spcAft>
-            </a:pPr>
-            <a:r>
-              <a:rPr sz="3800" b="1">
-                <a:solidFill>
-                  <a:srgbClr val="1F2A44"/>
+                <a:spcPts val="2160"/>
+              </a:spcAft>
+            </a:pPr>
+            <a:r>
+              <a:rPr sz="4800" b="1">
+                <a:solidFill>
+                  <a:srgbClr val="FBF7EF"/>
                 </a:solidFill>
                 <a:latin typeface="Fredoka"/>
               </a:rPr>
-              <a:t>Caso 1 · El batido del principio</a:t>
-            </a:r>
-          </a:p>
-        </p:txBody>
-      </p:sp>
-      <p:sp>
-        <p:nvSpPr>
-          <p:cNvPr id="4" name="Rectangle 3"/>
-          <p:cNvSpPr/>
-          <p:nvPr/>
-        </p:nvSpPr>
-        <p:spPr>
-          <a:xfrm>
-            <a:off x="640000" y="1600000"/>
-            <a:ext cx="10912000" cy="1100000"/>
-          </a:xfrm>
-          <a:prstGeom prst="rect">
-            <a:avLst/>
-          </a:prstGeom>
-          <a:solidFill>
-            <a:srgbClr val="FFFFFF"/>
-          </a:solidFill>
-          <a:ln>
-            <a:noFill/>
-          </a:ln>
-        </p:spPr>
-        <p:style>
-          <a:lnRef idx="1">
-            <a:schemeClr val="accent1"/>
-          </a:lnRef>
-          <a:fillRef idx="3">
-            <a:schemeClr val="accent1"/>
-          </a:fillRef>
-          <a:effectRef idx="2">
-            <a:schemeClr val="accent1"/>
-          </a:effectRef>
-          <a:fontRef idx="minor">
-            <a:schemeClr val="lt1"/>
-          </a:fontRef>
-        </p:style>
-        <p:txBody>
-          <a:bodyPr rtlCol="0" anchor="ctr"/>
-          <a:lstStyle/>
-          <a:p>
-            <a:pPr algn="ctr"/>
-          </a:p>
-        </p:txBody>
-      </p:sp>
-      <p:sp>
-        <p:nvSpPr>
-          <p:cNvPr id="5" name="TextBox 4"/>
-          <p:cNvSpPr txBox="1"/>
-          <p:nvPr/>
-        </p:nvSpPr>
-        <p:spPr>
-          <a:xfrm>
-            <a:off x="840000" y="1650000"/>
-            <a:ext cx="10512000" cy="1000000"/>
-          </a:xfrm>
-          <a:prstGeom prst="rect">
-            <a:avLst/>
-          </a:prstGeom>
-          <a:noFill/>
-        </p:spPr>
-        <p:txBody>
-          <a:bodyPr wrap="square" anchor="ctr">
-            <a:spAutoFit/>
-          </a:bodyPr>
-          <a:lstStyle/>
-          <a:p>
-            <a:pPr>
-              <a:spcAft>
-                <a:spcPts val="1170"/>
-              </a:spcAft>
-            </a:pPr>
-            <a:r>
-              <a:rPr sz="2600" b="1">
-                <a:solidFill>
-                  <a:srgbClr val="1F2A44"/>
-                </a:solidFill>
-                <a:latin typeface="Nunito Sans"/>
-              </a:rPr>
-              <a:t>«Este batido es el mejor. Lo toma el futbolista más famoso de la liga y lo compra todo el mundo.»</a:t>
-            </a:r>
-          </a:p>
-        </p:txBody>
-      </p:sp>
-      <p:sp>
-        <p:nvSpPr>
-          <p:cNvPr id="6" name="TextBox 5"/>
-          <p:cNvSpPr txBox="1"/>
-          <p:nvPr/>
-        </p:nvSpPr>
-        <p:spPr>
-          <a:xfrm>
-            <a:off x="640000" y="2900000"/>
-            <a:ext cx="10912000" cy="3500000"/>
-          </a:xfrm>
-          <a:prstGeom prst="rect">
-            <a:avLst/>
-          </a:prstGeom>
-          <a:noFill/>
-        </p:spPr>
-        <p:txBody>
-          <a:bodyPr wrap="square">
-            <a:spAutoFit/>
-          </a:bodyPr>
-          <a:lstStyle/>
-          <a:p>
-            <a:pPr>
-              <a:spcAft>
-                <a:spcPts val="1080"/>
-              </a:spcAft>
-            </a:pPr>
-            <a:r>
-              <a:rPr sz="2400" b="1">
-                <a:solidFill>
-                  <a:srgbClr val="E8793A"/>
-                </a:solidFill>
-                <a:latin typeface="Nunito Sans"/>
-              </a:rPr>
-              <a:t>1. </a:t>
-            </a:r>
-            <a:r>
-              <a:rPr sz="2400" b="0">
-                <a:solidFill>
-                  <a:srgbClr val="1F2A44"/>
-                </a:solidFill>
-                <a:latin typeface="Nunito Sans"/>
-              </a:rPr>
-              <a:t>¿Qué me piden creer? Que el batido es el mejor.</a:t>
-            </a:r>
-          </a:p>
-          <a:p>
-            <a:pPr>
-              <a:spcAft>
-                <a:spcPts val="1080"/>
-              </a:spcAft>
-            </a:pPr>
-            <a:r>
-              <a:rPr sz="2400" b="1">
-                <a:solidFill>
-                  <a:srgbClr val="E8793A"/>
-                </a:solidFill>
-                <a:latin typeface="Nunito Sans"/>
-              </a:rPr>
-              <a:t>2. </a:t>
-            </a:r>
-            <a:r>
-              <a:rPr sz="2400" b="0">
-                <a:solidFill>
-                  <a:srgbClr val="1F2A44"/>
-                </a:solidFill>
-                <a:latin typeface="Nunito Sans"/>
-              </a:rPr>
-              <a:t>¿Qué razones me dan? Lo toma un futbolista y lo compra mucha gente.</a:t>
-            </a:r>
-          </a:p>
-          <a:p>
-            <a:pPr>
-              <a:spcAft>
-                <a:spcPts val="1080"/>
-              </a:spcAft>
-            </a:pPr>
-            <a:r>
-              <a:rPr sz="2400" b="1">
-                <a:solidFill>
-                  <a:srgbClr val="E8793A"/>
-                </a:solidFill>
-                <a:latin typeface="Nunito Sans"/>
-              </a:rPr>
-              <a:t>3. </a:t>
-            </a:r>
-            <a:r>
-              <a:rPr sz="2400" b="0">
-                <a:solidFill>
-                  <a:srgbClr val="1F2A44"/>
-                </a:solidFill>
-                <a:latin typeface="Nunito Sans"/>
-              </a:rPr>
-              <a:t>¿Bastan? No: un futbolista no tiene por qué saber de nutrición, y venderse mucho no lo hace el mejor.</a:t>
-            </a:r>
-          </a:p>
-          <a:p>
-            <a:pPr>
-              <a:spcAft>
-                <a:spcPts val="1080"/>
-              </a:spcAft>
-            </a:pPr>
-            <a:r>
-              <a:rPr sz="2400" b="1">
-                <a:solidFill>
-                  <a:srgbClr val="E8793A"/>
-                </a:solidFill>
-                <a:latin typeface="Nunito Sans"/>
-              </a:rPr>
-              <a:t>4. </a:t>
-            </a:r>
-            <a:r>
-              <a:rPr sz="2400" b="0">
-                <a:solidFill>
-                  <a:srgbClr val="1F2A44"/>
-                </a:solidFill>
-                <a:latin typeface="Nunito Sans"/>
-              </a:rPr>
-              <a:t>Conclusión: parece un argumento, pero es una falacia. Sigo sin saber nada del batido.</a:t>
+              <a:t>Casos resueltos</a:t>
             </a:r>
           </a:p>
         </p:txBody>
@@ -4027,7 +3822,7 @@
                 </a:solidFill>
                 <a:latin typeface="Fredoka"/>
               </a:rPr>
-              <a:t>Caso 2 · Un argumento que sí es bueno</a:t>
+              <a:t>Caso 1 · La conclusión va primero</a:t>
             </a:r>
           </a:p>
         </p:txBody>
@@ -4109,7 +3904,7 @@
                 </a:solidFill>
                 <a:latin typeface="Nunito Sans"/>
               </a:rPr>
-              <a:t>Una chica: «Hoy me llevo el paraguas porque la app del tiempo da un 90 % de lluvia y el cielo está negro.»</a:t>
+              <a:t>«Tenemos que salir ya, porque el partido empieza a las seis y el metro tarda veinte minutos.»</a:t>
             </a:r>
           </a:p>
         </p:txBody>
@@ -4157,7 +3952,7 @@
                 </a:solidFill>
                 <a:latin typeface="Nunito Sans"/>
               </a:rPr>
-              <a:t>¿Es verdad? Se puede comprobar en la app y mirando al cielo.</a:t>
+              <a:t>Busco el indicador: «porque». Lo que va detrás son premisas.</a:t>
             </a:r>
           </a:p>
           <a:p>
@@ -4182,7 +3977,7 @@
                 </a:solidFill>
                 <a:latin typeface="Nunito Sans"/>
               </a:rPr>
-              <a:t>¿Viene a cuento? Sí: las dos razones hablan de si va a llover.</a:t>
+              <a:t>Premisas: el partido empieza a las seis; el metro tarda veinte minutos.</a:t>
             </a:r>
           </a:p>
           <a:p>
@@ -4207,7 +4002,7 @@
                 </a:solidFill>
                 <a:latin typeface="Nunito Sans"/>
               </a:rPr>
-              <a:t>¿Es suficiente? Para llevar un paraguas, sí.</a:t>
+              <a:t>Lo que va delante es lo que quiere que acepte: tenemos que salir ya.</a:t>
             </a:r>
           </a:p>
           <a:p>
@@ -4232,7 +4027,7 @@
                 </a:solidFill>
                 <a:latin typeface="Nunito Sans"/>
               </a:rPr>
-              <a:t>Conclusión: no es una falacia. No todos los argumentos son trucos.</a:t>
+              <a:t>Conclusión: la conclusión no siempre va al final. Lo que manda es qué apoya a qué.</a:t>
             </a:r>
           </a:p>
         </p:txBody>
@@ -4251,7 +4046,7 @@
     <p:bg>
       <p:bgPr>
         <a:solidFill>
-          <a:srgbClr val="1F2A44"/>
+          <a:srgbClr val="FBF7EF"/>
         </a:solidFill>
         <a:effectLst/>
       </p:bgPr>
@@ -4271,8 +4066,8 @@
         </p:nvSpPr>
         <p:spPr>
           <a:xfrm>
-            <a:off x="640000" y="2300000"/>
-            <a:ext cx="10912000" cy="500000"/>
+            <a:off x="640000" y="380000"/>
+            <a:ext cx="10912000" cy="420000"/>
           </a:xfrm>
           <a:prstGeom prst="rect">
             <a:avLst/>
@@ -4287,17 +4082,17 @@
           <a:p>
             <a:pPr>
               <a:spcAft>
-                <a:spcPts val="810"/>
-              </a:spcAft>
-            </a:pPr>
-            <a:r>
-              <a:rPr sz="1800" b="1">
-                <a:solidFill>
-                  <a:srgbClr val="F4B183"/>
-                </a:solidFill>
-                <a:latin typeface="Nunito Sans"/>
-              </a:rPr>
-              <a:t>BLOQUE 3</a:t>
+                <a:spcPts val="630"/>
+              </a:spcAft>
+            </a:pPr>
+            <a:r>
+              <a:rPr sz="1400" b="1">
+                <a:solidFill>
+                  <a:srgbClr val="E8793A"/>
+                </a:solidFill>
+                <a:latin typeface="Nunito Sans"/>
+              </a:rPr>
+              <a:t>BLOQUE 2 · CASOS RESUELTOS</a:t>
             </a:r>
           </a:p>
         </p:txBody>
@@ -4310,7 +4105,7 @@
         </p:nvSpPr>
         <p:spPr>
           <a:xfrm>
-            <a:off x="640000" y="2800000"/>
+            <a:off x="640000" y="760000"/>
             <a:ext cx="10912000" cy="800000"/>
           </a:xfrm>
           <a:prstGeom prst="rect">
@@ -4326,17 +4121,222 @@
           <a:p>
             <a:pPr>
               <a:spcAft>
-                <a:spcPts val="2160"/>
-              </a:spcAft>
-            </a:pPr>
-            <a:r>
-              <a:rPr sz="4800" b="1">
-                <a:solidFill>
-                  <a:srgbClr val="FBF7EF"/>
+                <a:spcPts val="1710"/>
+              </a:spcAft>
+            </a:pPr>
+            <a:r>
+              <a:rPr sz="3800" b="1">
+                <a:solidFill>
+                  <a:srgbClr val="1F2A44"/>
                 </a:solidFill>
                 <a:latin typeface="Fredoka"/>
               </a:rPr>
-              <a:t>Ojo</a:t>
+              <a:t>Caso 2 · Sin indicadores</a:t>
+            </a:r>
+          </a:p>
+        </p:txBody>
+      </p:sp>
+      <p:sp>
+        <p:nvSpPr>
+          <p:cNvPr id="4" name="Rectangle 3"/>
+          <p:cNvSpPr/>
+          <p:nvPr/>
+        </p:nvSpPr>
+        <p:spPr>
+          <a:xfrm>
+            <a:off x="640000" y="1600000"/>
+            <a:ext cx="10912000" cy="1100000"/>
+          </a:xfrm>
+          <a:prstGeom prst="rect">
+            <a:avLst/>
+          </a:prstGeom>
+          <a:solidFill>
+            <a:srgbClr val="FFFFFF"/>
+          </a:solidFill>
+          <a:ln>
+            <a:noFill/>
+          </a:ln>
+        </p:spPr>
+        <p:style>
+          <a:lnRef idx="1">
+            <a:schemeClr val="accent1"/>
+          </a:lnRef>
+          <a:fillRef idx="3">
+            <a:schemeClr val="accent1"/>
+          </a:fillRef>
+          <a:effectRef idx="2">
+            <a:schemeClr val="accent1"/>
+          </a:effectRef>
+          <a:fontRef idx="minor">
+            <a:schemeClr val="lt1"/>
+          </a:fontRef>
+        </p:style>
+        <p:txBody>
+          <a:bodyPr rtlCol="0" anchor="ctr"/>
+          <a:lstStyle/>
+          <a:p>
+            <a:pPr algn="ctr"/>
+          </a:p>
+        </p:txBody>
+      </p:sp>
+      <p:sp>
+        <p:nvSpPr>
+          <p:cNvPr id="5" name="TextBox 4"/>
+          <p:cNvSpPr txBox="1"/>
+          <p:nvPr/>
+        </p:nvSpPr>
+        <p:spPr>
+          <a:xfrm>
+            <a:off x="840000" y="1650000"/>
+            <a:ext cx="10512000" cy="1000000"/>
+          </a:xfrm>
+          <a:prstGeom prst="rect">
+            <a:avLst/>
+          </a:prstGeom>
+          <a:noFill/>
+        </p:spPr>
+        <p:txBody>
+          <a:bodyPr wrap="square" anchor="ctr">
+            <a:spAutoFit/>
+          </a:bodyPr>
+          <a:lstStyle/>
+          <a:p>
+            <a:pPr>
+              <a:spcAft>
+                <a:spcPts val="1170"/>
+              </a:spcAft>
+            </a:pPr>
+            <a:r>
+              <a:rPr sz="2600" b="1">
+                <a:solidFill>
+                  <a:srgbClr val="1F2A44"/>
+                </a:solidFill>
+                <a:latin typeface="Nunito Sans"/>
+              </a:rPr>
+              <a:t>«Esa cuenta se creó ayer y no dice de dónde saca las imágenes. Ese vídeo puede ser falso.»</a:t>
+            </a:r>
+          </a:p>
+        </p:txBody>
+      </p:sp>
+      <p:sp>
+        <p:nvSpPr>
+          <p:cNvPr id="6" name="TextBox 5"/>
+          <p:cNvSpPr txBox="1"/>
+          <p:nvPr/>
+        </p:nvSpPr>
+        <p:spPr>
+          <a:xfrm>
+            <a:off x="640000" y="2900000"/>
+            <a:ext cx="10912000" cy="3500000"/>
+          </a:xfrm>
+          <a:prstGeom prst="rect">
+            <a:avLst/>
+          </a:prstGeom>
+          <a:noFill/>
+        </p:spPr>
+        <p:txBody>
+          <a:bodyPr wrap="square">
+            <a:spAutoFit/>
+          </a:bodyPr>
+          <a:lstStyle/>
+          <a:p>
+            <a:pPr>
+              <a:spcAft>
+                <a:spcPts val="1080"/>
+              </a:spcAft>
+            </a:pPr>
+            <a:r>
+              <a:rPr sz="2400" b="1">
+                <a:solidFill>
+                  <a:srgbClr val="E8793A"/>
+                </a:solidFill>
+                <a:latin typeface="Nunito Sans"/>
+              </a:rPr>
+              <a:t>1. </a:t>
+            </a:r>
+            <a:r>
+              <a:rPr sz="2400" b="0">
+                <a:solidFill>
+                  <a:srgbClr val="1F2A44"/>
+                </a:solidFill>
+                <a:latin typeface="Nunito Sans"/>
+              </a:rPr>
+              <a:t>No hay «porque» ni «por tanto». Me pregunto: ¿qué quiere que acepte?</a:t>
+            </a:r>
+          </a:p>
+          <a:p>
+            <a:pPr>
+              <a:spcAft>
+                <a:spcPts val="1080"/>
+              </a:spcAft>
+            </a:pPr>
+            <a:r>
+              <a:rPr sz="2400" b="1">
+                <a:solidFill>
+                  <a:srgbClr val="E8793A"/>
+                </a:solidFill>
+                <a:latin typeface="Nunito Sans"/>
+              </a:rPr>
+              <a:t>2. </a:t>
+            </a:r>
+            <a:r>
+              <a:rPr sz="2400" b="0">
+                <a:solidFill>
+                  <a:srgbClr val="1F2A44"/>
+                </a:solidFill>
+                <a:latin typeface="Nunito Sans"/>
+              </a:rPr>
+              <a:t>Que el vídeo puede ser falso: esa es la conclusión.</a:t>
+            </a:r>
+          </a:p>
+          <a:p>
+            <a:pPr>
+              <a:spcAft>
+                <a:spcPts val="1080"/>
+              </a:spcAft>
+            </a:pPr>
+            <a:r>
+              <a:rPr sz="2400" b="1">
+                <a:solidFill>
+                  <a:srgbClr val="E8793A"/>
+                </a:solidFill>
+                <a:latin typeface="Nunito Sans"/>
+              </a:rPr>
+              <a:t>3. </a:t>
+            </a:r>
+            <a:r>
+              <a:rPr sz="2400" b="0">
+                <a:solidFill>
+                  <a:srgbClr val="1F2A44"/>
+                </a:solidFill>
+                <a:latin typeface="Nunito Sans"/>
+              </a:rPr>
+              <a:t>¿Qué da para apoyarlo? La cuenta es nueva y no dice de dónde saca las imágenes: son las premisas.</a:t>
+            </a:r>
+          </a:p>
+          <a:p>
+            <a:pPr>
+              <a:spcAft>
+                <a:spcPts val="1080"/>
+              </a:spcAft>
+            </a:pPr>
+            <a:r>
+              <a:rPr sz="2400" b="1">
+                <a:solidFill>
+                  <a:srgbClr val="E8793A"/>
+                </a:solidFill>
+                <a:latin typeface="Nunito Sans"/>
+              </a:rPr>
+              <a:t>4. </a:t>
+            </a:r>
+            <a:r>
+              <a:rPr sz="2400" b="0">
+                <a:solidFill>
+                  <a:srgbClr val="1F2A44"/>
+                </a:solidFill>
+                <a:latin typeface="Nunito Sans"/>
+              </a:rPr>
+              <a:t>Conclusión: sin indicadores, pregunto «¿qué apoya a qué?».</a:t>
             </a:r>
           </a:p>
         </p:txBody>
@@ -4401,7 +4401,7 @@
                 </a:solidFill>
                 <a:latin typeface="Nunito Sans"/>
               </a:rPr>
-              <a:t>BLOQUE 3 · OJO</a:t>
+              <a:t>BLOQUE 2 · CASOS RESUELTOS</a:t>
             </a:r>
           </a:p>
         </p:txBody>
@@ -4440,21 +4440,64 @@
                 </a:solidFill>
                 <a:latin typeface="Fredoka"/>
               </a:rPr>
-              <a:t>Tres ideas para no liarse</a:t>
-            </a:r>
-          </a:p>
-        </p:txBody>
-      </p:sp>
-      <p:sp>
-        <p:nvSpPr>
-          <p:cNvPr id="4" name="TextBox 3"/>
+              <a:t>Caso 3 · ¿Argumento o no?</a:t>
+            </a:r>
+          </a:p>
+        </p:txBody>
+      </p:sp>
+      <p:sp>
+        <p:nvSpPr>
+          <p:cNvPr id="4" name="Rectangle 3"/>
+          <p:cNvSpPr/>
+          <p:nvPr/>
+        </p:nvSpPr>
+        <p:spPr>
+          <a:xfrm>
+            <a:off x="640000" y="1600000"/>
+            <a:ext cx="10912000" cy="1100000"/>
+          </a:xfrm>
+          <a:prstGeom prst="rect">
+            <a:avLst/>
+          </a:prstGeom>
+          <a:solidFill>
+            <a:srgbClr val="FFFFFF"/>
+          </a:solidFill>
+          <a:ln>
+            <a:noFill/>
+          </a:ln>
+        </p:spPr>
+        <p:style>
+          <a:lnRef idx="1">
+            <a:schemeClr val="accent1"/>
+          </a:lnRef>
+          <a:fillRef idx="3">
+            <a:schemeClr val="accent1"/>
+          </a:fillRef>
+          <a:effectRef idx="2">
+            <a:schemeClr val="accent1"/>
+          </a:effectRef>
+          <a:fontRef idx="minor">
+            <a:schemeClr val="lt1"/>
+          </a:fontRef>
+        </p:style>
+        <p:txBody>
+          <a:bodyPr rtlCol="0" anchor="ctr"/>
+          <a:lstStyle/>
+          <a:p>
+            <a:pPr algn="ctr"/>
+          </a:p>
+        </p:txBody>
+      </p:sp>
+      <p:sp>
+        <p:nvSpPr>
+          <p:cNvPr id="5" name="TextBox 4"/>
           <p:cNvSpPr txBox="1"/>
           <p:nvPr/>
         </p:nvSpPr>
         <p:spPr>
           <a:xfrm>
-            <a:off x="640000" y="1650000"/>
-            <a:ext cx="10912000" cy="4808000"/>
+            <a:off x="840000" y="1650000"/>
+            <a:ext cx="10512000" cy="1000000"/>
           </a:xfrm>
           <a:prstGeom prst="rect">
             <a:avLst/>
@@ -4462,6 +4505,45 @@
           <a:noFill/>
         </p:spPr>
         <p:txBody>
+          <a:bodyPr wrap="square" anchor="ctr">
+            <a:spAutoFit/>
+          </a:bodyPr>
+          <a:lstStyle/>
+          <a:p>
+            <a:pPr>
+              <a:spcAft>
+                <a:spcPts val="1170"/>
+              </a:spcAft>
+            </a:pPr>
+            <a:r>
+              <a:rPr sz="2600" b="1">
+                <a:solidFill>
+                  <a:srgbClr val="1F2A44"/>
+                </a:solidFill>
+                <a:latin typeface="Nunito Sans"/>
+              </a:rPr>
+              <a:t>«Aste Nagusia es en agosto. Hay txosnas, conciertos y fuegos artificiales.»</a:t>
+            </a:r>
+          </a:p>
+        </p:txBody>
+      </p:sp>
+      <p:sp>
+        <p:nvSpPr>
+          <p:cNvPr id="6" name="TextBox 5"/>
+          <p:cNvSpPr txBox="1"/>
+          <p:nvPr/>
+        </p:nvSpPr>
+        <p:spPr>
+          <a:xfrm>
+            <a:off x="640000" y="2900000"/>
+            <a:ext cx="10912000" cy="3500000"/>
+          </a:xfrm>
+          <a:prstGeom prst="rect">
+            <a:avLst/>
+          </a:prstGeom>
+          <a:noFill/>
+        </p:spPr>
+        <p:txBody>
           <a:bodyPr wrap="square">
             <a:spAutoFit/>
           </a:bodyPr>
@@ -4469,148 +4551,76 @@
           <a:p>
             <a:pPr>
               <a:spcAft>
-                <a:spcPts val="1260"/>
-              </a:spcAft>
-            </a:pPr>
-            <a:r>
-              <a:rPr sz="2800" b="1">
+                <a:spcPts val="1080"/>
+              </a:spcAft>
+            </a:pPr>
+            <a:r>
+              <a:rPr sz="2400" b="1">
                 <a:solidFill>
                   <a:srgbClr val="E8793A"/>
                 </a:solidFill>
                 <a:latin typeface="Nunito Sans"/>
               </a:rPr>
-              <a:t>• </a:t>
-            </a:r>
-            <a:r>
-              <a:rPr sz="2800" b="0">
+              <a:t>1. </a:t>
+            </a:r>
+            <a:r>
+              <a:rPr sz="2400" b="0">
                 <a:solidFill>
                   <a:srgbClr val="1F2A44"/>
                 </a:solidFill>
                 <a:latin typeface="Nunito Sans"/>
               </a:rPr>
-              <a:t>Una falacia puede tener una </a:t>
-            </a:r>
-            <a:r>
-              <a:rPr sz="2800" b="1">
+              <a:t>¿Hay algo que quiera que acepte? No: solo cuenta cosas.</a:t>
+            </a:r>
+          </a:p>
+          <a:p>
+            <a:pPr>
+              <a:spcAft>
+                <a:spcPts val="1080"/>
+              </a:spcAft>
+            </a:pPr>
+            <a:r>
+              <a:rPr sz="2400" b="1">
+                <a:solidFill>
+                  <a:srgbClr val="E8793A"/>
+                </a:solidFill>
+                <a:latin typeface="Nunito Sans"/>
+              </a:rPr>
+              <a:t>2. </a:t>
+            </a:r>
+            <a:r>
+              <a:rPr sz="2400" b="0">
                 <a:solidFill>
                   <a:srgbClr val="1F2A44"/>
                 </a:solidFill>
                 <a:latin typeface="Nunito Sans"/>
               </a:rPr>
-              <a:t>conclusión verdadera</a:t>
-            </a:r>
-            <a:r>
-              <a:rPr sz="2800" b="0">
+              <a:t>¿Alguna frase apoya a otra? No: son datos sueltos.</a:t>
+            </a:r>
+          </a:p>
+          <a:p>
+            <a:pPr>
+              <a:spcAft>
+                <a:spcPts val="1080"/>
+              </a:spcAft>
+            </a:pPr>
+            <a:r>
+              <a:rPr sz="2400" b="1">
+                <a:solidFill>
+                  <a:srgbClr val="E8793A"/>
+                </a:solidFill>
+                <a:latin typeface="Nunito Sans"/>
+              </a:rPr>
+              <a:t>3. </a:t>
+            </a:r>
+            <a:r>
+              <a:rPr sz="2400" b="0">
                 <a:solidFill>
                   <a:srgbClr val="1F2A44"/>
                 </a:solidFill>
                 <a:latin typeface="Nunito Sans"/>
               </a:rPr>
-              <a:t>: falla el camino, no el final.</a:t>
-            </a:r>
-          </a:p>
-          <a:p>
-            <a:pPr>
-              <a:spcAft>
-                <a:spcPts val="1260"/>
-              </a:spcAft>
-            </a:pPr>
-            <a:r>
-              <a:rPr sz="2800" b="1">
-                <a:solidFill>
-                  <a:srgbClr val="E8793A"/>
-                </a:solidFill>
-                <a:latin typeface="Nunito Sans"/>
-              </a:rPr>
-              <a:t>• </a:t>
-            </a:r>
-            <a:r>
-              <a:rPr sz="2800" b="0">
-                <a:solidFill>
-                  <a:srgbClr val="1F2A44"/>
-                </a:solidFill>
-                <a:latin typeface="Nunito Sans"/>
-              </a:rPr>
-              <a:t>Una frase falsa no es una falacia: es solo un error.</a:t>
-            </a:r>
-          </a:p>
-          <a:p>
-            <a:pPr>
-              <a:spcAft>
-                <a:spcPts val="1260"/>
-              </a:spcAft>
-            </a:pPr>
-            <a:r>
-              <a:rPr sz="2800" b="1">
-                <a:solidFill>
-                  <a:srgbClr val="E8793A"/>
-                </a:solidFill>
-                <a:latin typeface="Nunito Sans"/>
-              </a:rPr>
-              <a:t>• </a:t>
-            </a:r>
-            <a:r>
-              <a:rPr sz="2800" b="0">
-                <a:solidFill>
-                  <a:srgbClr val="1F2A44"/>
-                </a:solidFill>
-                <a:latin typeface="Nunito Sans"/>
-              </a:rPr>
-              <a:t>En esta unidad: falacias que </a:t>
-            </a:r>
-            <a:r>
-              <a:rPr sz="2800" b="1">
-                <a:solidFill>
-                  <a:srgbClr val="1F2A44"/>
-                </a:solidFill>
-                <a:latin typeface="Nunito Sans"/>
-              </a:rPr>
-              <a:t>atacan</a:t>
-            </a:r>
-            <a:r>
-              <a:rPr sz="2800" b="0">
-                <a:solidFill>
-                  <a:srgbClr val="1F2A44"/>
-                </a:solidFill>
-                <a:latin typeface="Nunito Sans"/>
-              </a:rPr>
-              <a:t>, </a:t>
-            </a:r>
-            <a:r>
-              <a:rPr sz="2800" b="1">
-                <a:solidFill>
-                  <a:srgbClr val="1F2A44"/>
-                </a:solidFill>
-                <a:latin typeface="Nunito Sans"/>
-              </a:rPr>
-              <a:t>desvían</a:t>
-            </a:r>
-            <a:r>
-              <a:rPr sz="2800" b="0">
-                <a:solidFill>
-                  <a:srgbClr val="1F2A44"/>
-                </a:solidFill>
-                <a:latin typeface="Nunito Sans"/>
-              </a:rPr>
-              <a:t> o </a:t>
-            </a:r>
-            <a:r>
-              <a:rPr sz="2800" b="1">
-                <a:solidFill>
-                  <a:srgbClr val="1F2A44"/>
-                </a:solidFill>
-                <a:latin typeface="Nunito Sans"/>
-              </a:rPr>
-              <a:t>emocionan</a:t>
-            </a:r>
-            <a:r>
-              <a:rPr sz="2800" b="0">
-                <a:solidFill>
-                  <a:srgbClr val="1F2A44"/>
-                </a:solidFill>
-                <a:latin typeface="Nunito Sans"/>
-              </a:rPr>
-              <a:t>.</a:t>
+              <a:t>Conclusión: no es un argumento. Es una descripción.</a:t>
             </a:r>
           </a:p>
         </p:txBody>
@@ -4675,7 +4685,7 @@
                 </a:solidFill>
                 <a:latin typeface="Nunito Sans"/>
               </a:rPr>
-              <a:t>CASO TRAMPA · BLOQUE 3 · OJO</a:t>
+              <a:t>CASO TRAMPA · BLOQUE 2 · CASOS RESUELTOS</a:t>
             </a:r>
           </a:p>
         </p:txBody>
@@ -4714,7 +4724,7 @@
                 </a:solidFill>
                 <a:latin typeface="Fredoka"/>
               </a:rPr>
-              <a:t>⚠ Conclusión verdadera, ¿argumento bueno?</a:t>
+              <a:t>⚠ Un «porque» que no es premisa</a:t>
             </a:r>
           </a:p>
         </p:txBody>
@@ -4796,7 +4806,7 @@
                 </a:solidFill>
                 <a:latin typeface="Nunito Sans"/>
               </a:rPr>
-              <a:t>Un chico: «Fumar es malo para la salud. Lo sé porque lo dice mi youtuber de videojuegos favorito».</a:t>
+              <a:t>Una chica entra en clase empapada. Un chico le pregunta qué ha pasado. La chica: «Estoy empapada porque me ha pillado la tormenta».</a:t>
             </a:r>
           </a:p>
         </p:txBody>
@@ -4844,7 +4854,7 @@
                 </a:solidFill>
                 <a:latin typeface="Nunito Sans"/>
               </a:rPr>
-              <a:t>Lo que dice es verdad. ¿Entonces su argumento es bueno?</a:t>
+              <a:t>Lleva «porque». ¿Es un argumento? ¿Cuál es la premisa?</a:t>
             </a:r>
           </a:p>
           <a:p>
@@ -4869,7 +4879,7 @@
                 </a:solidFill>
                 <a:latin typeface="Nunito Sans"/>
               </a:rPr>
-              <a:t>La conclusión es verdad: la medicina lo ha comprobado muchísimas veces.</a:t>
+              <a:t>El chico ya ve que está empapada: no hace falta convencerle de eso.</a:t>
             </a:r>
           </a:p>
           <a:p>
@@ -4894,7 +4904,25 @@
                 </a:solidFill>
                 <a:latin typeface="Nunito Sans"/>
               </a:rPr>
-              <a:t>Pero su razón es otra: un youtuber de videojuegos, que no tiene por qué saber de salud.</a:t>
+              <a:t>La chica no quiere que acepte nada: le </a:t>
+            </a:r>
+            <a:r>
+              <a:rPr sz="2400" b="1">
+                <a:solidFill>
+                  <a:srgbClr val="1F2A44"/>
+                </a:solidFill>
+                <a:latin typeface="Nunito Sans"/>
+              </a:rPr>
+              <a:t>explica</a:t>
+            </a:r>
+            <a:r>
+              <a:rPr sz="2400" b="0">
+                <a:solidFill>
+                  <a:srgbClr val="1F2A44"/>
+                </a:solidFill>
+                <a:latin typeface="Nunito Sans"/>
+              </a:rPr>
+              <a:t> por qué ha pasado.</a:t>
             </a:r>
           </a:p>
           <a:p>
@@ -4919,7 +4947,25 @@
                 </a:solidFill>
                 <a:latin typeface="Nunito Sans"/>
               </a:rPr>
-              <a:t>¿Basta esa razón? No: la conclusión es verdad, pero no gracias a ella.</a:t>
+              <a:t>Ese «porque» da una </a:t>
+            </a:r>
+            <a:r>
+              <a:rPr sz="2400" b="1">
+                <a:solidFill>
+                  <a:srgbClr val="1F2A44"/>
+                </a:solidFill>
+                <a:latin typeface="Nunito Sans"/>
+              </a:rPr>
+              <a:t>causa</a:t>
+            </a:r>
+            <a:r>
+              <a:rPr sz="2400" b="0">
+                <a:solidFill>
+                  <a:srgbClr val="1F2A44"/>
+                </a:solidFill>
+                <a:latin typeface="Nunito Sans"/>
+              </a:rPr>
+              <a:t>, no una razón para creer algo.</a:t>
             </a:r>
           </a:p>
           <a:p>
@@ -4944,7 +4990,7 @@
                 </a:solidFill>
                 <a:latin typeface="Nunito Sans"/>
               </a:rPr>
-              <a:t>Conclusión: una conclusión verdadera no hace bueno el argumento. Mira el camino, no solo el final.</a:t>
+              <a:t>Conclusión: no es un argumento, es una explicación. Los indicadores ayudan, pero hay que pensar.</a:t>
             </a:r>
           </a:p>
         </p:txBody>
@@ -5200,7 +5246,7 @@
                 </a:solidFill>
                 <a:latin typeface="Nunito Sans"/>
               </a:rPr>
-              <a:t>Una falacia es un argumento que parece bueno, pero no lo es.</a:t>
+              <a:t>Un argumento es una conclusión apoyada en premisas, que son las razones.</a:t>
             </a:r>
           </a:p>
           <a:p>
@@ -5225,7 +5271,7 @@
                 </a:solidFill>
                 <a:latin typeface="Nunito Sans"/>
               </a:rPr>
-              <a:t>Casi siempre falla así: la razón no viene a cuento o no es suficiente.</a:t>
+              <a:t>Indicadores como «porque» o «por tanto» ayudan a encontrar cada parte.</a:t>
             </a:r>
           </a:p>
           <a:p>
@@ -5250,7 +5296,7 @@
                 </a:solidFill>
                 <a:latin typeface="Nunito Sans"/>
               </a:rPr>
-              <a:t>Una falacia puede tener una conclusión verdadera: lo que falla es el camino.</a:t>
+              <a:t>La conclusión no siempre va al final: pregunta qué apoya a qué.</a:t>
             </a:r>
           </a:p>
         </p:txBody>
@@ -5354,7 +5400,7 @@
                 </a:solidFill>
                 <a:latin typeface="Fredoka"/>
               </a:rPr>
-              <a:t>Qué es una falacia, explicado con ejemplos sencillos</a:t>
+              <a:t>Premisas y conclusión de un argumento</a:t>
             </a:r>
           </a:p>
         </p:txBody>
@@ -5393,7 +5439,7 @@
                 </a:solidFill>
                 <a:latin typeface="Nunito Sans"/>
               </a:rPr>
-              <a:t>Oír la definición con otras palabras y ver ejemplos de la vida diaria.</a:t>
+              <a:t>Oír otra explicación de premisas, conclusión e indicadores, con ejemplos sencillos.</a:t>
             </a:r>
           </a:p>
         </p:txBody>
@@ -6051,7 +6097,7 @@
                 </a:solidFill>
                 <a:latin typeface="Nunito Sans"/>
               </a:rPr>
-              <a:t>Una premisa ______ no se dice, pero hace falta.  (sesión 12)</a:t>
+              <a:t>Una pregunta ______ pide explicar, contar o dar razones.  (sesión 12)</a:t>
             </a:r>
           </a:p>
           <a:p>
@@ -6076,7 +6122,7 @@
                 </a:solidFill>
                 <a:latin typeface="Nunito Sans"/>
               </a:rPr>
-              <a:t>La conclusión de una inducción es ______: puede fallar.  (sesión 12)</a:t>
+              <a:t>«¿Por qué?» puede pedir la causa o las ______; «¿para qué?», la finalidad.  (sesión 12)</a:t>
             </a:r>
           </a:p>
           <a:p>
@@ -6253,7 +6299,7 @@
                 </a:solidFill>
                 <a:latin typeface="Nunito Sans"/>
               </a:rPr>
-              <a:t>Una premisa </a:t>
+              <a:t>Una pregunta </a:t>
             </a:r>
             <a:r>
               <a:rPr sz="2600" b="1">
@@ -6262,7 +6308,7 @@
                 </a:solidFill>
                 <a:latin typeface="Nunito Sans"/>
               </a:rPr>
-              <a:t>oculta</a:t>
+              <a:t>abierta</a:t>
             </a:r>
             <a:r>
               <a:rPr sz="2600" b="0">
@@ -6271,7 +6317,7 @@
                 </a:solidFill>
                 <a:latin typeface="Nunito Sans"/>
               </a:rPr>
-              <a:t> no se dice, pero hace falta.  (sesión 12)</a:t>
+              <a:t> pide explicar, contar o dar razones.  (sesión 12)</a:t>
             </a:r>
           </a:p>
           <a:p>
@@ -6296,7 +6342,7 @@
                 </a:solidFill>
                 <a:latin typeface="Nunito Sans"/>
               </a:rPr>
-              <a:t>La conclusión de una inducción es </a:t>
+              <a:t>«¿Por qué?» puede pedir la causa o las </a:t>
             </a:r>
             <a:r>
               <a:rPr sz="2600" b="1">
@@ -6305,7 +6351,7 @@
                 </a:solidFill>
                 <a:latin typeface="Nunito Sans"/>
               </a:rPr>
-              <a:t>probable</a:t>
+              <a:t>razones</a:t>
             </a:r>
             <a:r>
               <a:rPr sz="2600" b="0">
@@ -6314,7 +6360,7 @@
                 </a:solidFill>
                 <a:latin typeface="Nunito Sans"/>
               </a:rPr>
-              <a:t>: puede fallar.  (sesión 12)</a:t>
+              <a:t>; «¿para qué?», la finalidad.  (sesión 12)</a:t>
             </a:r>
           </a:p>
           <a:p>
@@ -6504,7 +6550,7 @@
                 </a:solidFill>
                 <a:latin typeface="Nunito Sans"/>
               </a:rPr>
-              <a:t>«Este batido es el mejor. Lo toma el futbolista más famoso de la liga y lo compra todo el mundo.»</a:t>
+              <a:t>«No compres esas zapatillas: cuestan 120 euros y tienes otras casi nuevas.»</a:t>
             </a:r>
           </a:p>
         </p:txBody>
@@ -6543,7 +6589,7 @@
                 </a:solidFill>
                 <a:latin typeface="Nunito Sans"/>
               </a:rPr>
-              <a:t>¿Qué sabes de verdad del batido después de leer esto?</a:t>
+              <a:t>¿Qué te pide que hagas? ¿Qué te da para convencerte?</a:t>
             </a:r>
           </a:p>
         </p:txBody>
@@ -6647,7 +6693,7 @@
                 </a:solidFill>
                 <a:latin typeface="Fredoka"/>
               </a:rPr>
-              <a:t>Qué es una falacia</a:t>
+              <a:t>Las partes de un argumento</a:t>
             </a:r>
           </a:p>
         </p:txBody>
@@ -6712,7 +6758,7 @@
                 </a:solidFill>
                 <a:latin typeface="Nunito Sans"/>
               </a:rPr>
-              <a:t>BLOQUE 1 · QUÉ ES UNA FALACIA</a:t>
+              <a:t>BLOQUE 1 · LAS PARTES DE UN ARGUMENTO</a:t>
             </a:r>
           </a:p>
         </p:txBody>
@@ -6751,7 +6797,7 @@
                 </a:solidFill>
                 <a:latin typeface="Fredoka"/>
               </a:rPr>
-              <a:t>Falacia</a:t>
+              <a:t>Argumento</a:t>
             </a:r>
           </a:p>
         </p:txBody>
@@ -6833,7 +6879,43 @@
                 </a:solidFill>
                 <a:latin typeface="Nunito Sans"/>
               </a:rPr>
-              <a:t>Solemos llamar falacia a un argumento que parece bueno, pero no lo es: sus razones no sostienen la conclusión.</a:t>
+              <a:t>Un argumento es una </a:t>
+            </a:r>
+            <a:r>
+              <a:rPr sz="2800" b="1">
+                <a:solidFill>
+                  <a:srgbClr val="1F2A44"/>
+                </a:solidFill>
+                <a:latin typeface="Nunito Sans"/>
+              </a:rPr>
+              <a:t>conclusión</a:t>
+            </a:r>
+            <a:r>
+              <a:rPr sz="2800" b="1">
+                <a:solidFill>
+                  <a:srgbClr val="1F2A44"/>
+                </a:solidFill>
+                <a:latin typeface="Nunito Sans"/>
+              </a:rPr>
+              <a:t> apoyada en una o más </a:t>
+            </a:r>
+            <a:r>
+              <a:rPr sz="2800" b="1">
+                <a:solidFill>
+                  <a:srgbClr val="1F2A44"/>
+                </a:solidFill>
+                <a:latin typeface="Nunito Sans"/>
+              </a:rPr>
+              <a:t>premisas</a:t>
+            </a:r>
+            <a:r>
+              <a:rPr sz="2800" b="1">
+                <a:solidFill>
+                  <a:srgbClr val="1F2A44"/>
+                </a:solidFill>
+                <a:latin typeface="Nunito Sans"/>
+              </a:rPr>
+              <a:t>.</a:t>
             </a:r>
           </a:p>
         </p:txBody>
@@ -6875,22 +6957,47 @@
               <a:t>• </a:t>
             </a:r>
             <a:r>
+              <a:rPr sz="2800" b="1">
+                <a:solidFill>
+                  <a:srgbClr val="1F2A44"/>
+                </a:solidFill>
+                <a:latin typeface="Nunito Sans"/>
+              </a:rPr>
+              <a:t>Conclusión:</a:t>
+            </a:r>
+            <a:r>
               <a:rPr sz="2800" b="0">
                 <a:solidFill>
                   <a:srgbClr val="1F2A44"/>
                 </a:solidFill>
                 <a:latin typeface="Nunito Sans"/>
               </a:rPr>
-              <a:t>Puede ser un </a:t>
-            </a:r>
+              <a:t> lo que quiero que aceptes</a:t>
+            </a:r>
+          </a:p>
+          <a:p>
+            <a:pPr>
+              <a:spcAft>
+                <a:spcPts val="1260"/>
+              </a:spcAft>
+            </a:pPr>
             <a:r>
               <a:rPr sz="2800" b="1">
                 <a:solidFill>
+                  <a:srgbClr val="E8793A"/>
+                </a:solidFill>
+                <a:latin typeface="Nunito Sans"/>
+              </a:rPr>
+              <a:t>• </a:t>
+            </a:r>
+            <a:r>
+              <a:rPr sz="2800" b="1">
+                <a:solidFill>
                   <a:srgbClr val="1F2A44"/>
                 </a:solidFill>
                 <a:latin typeface="Nunito Sans"/>
               </a:rPr>
-              <a:t>truco</a:t>
+              <a:t>Premisas:</a:t>
             </a:r>
             <a:r>
               <a:rPr sz="2800" b="0">
@@ -6899,7 +7006,7 @@
                 </a:solidFill>
                 <a:latin typeface="Nunito Sans"/>
               </a:rPr>
-              <a:t> para engañar…</a:t>
+              <a:t> las razones que doy para que lo aceptes</a:t>
             </a:r>
           </a:p>
           <a:p>
@@ -6924,41 +7031,7 @@
                 </a:solidFill>
                 <a:latin typeface="Nunito Sans"/>
               </a:rPr>
-              <a:t>… o un error que cometemos sin darnos cuenta</a:t>
-            </a:r>
-          </a:p>
-          <a:p>
-            <a:pPr>
-              <a:spcAft>
-                <a:spcPts val="1260"/>
-              </a:spcAft>
-            </a:pPr>
-            <a:r>
-              <a:rPr sz="2800" b="1">
-                <a:solidFill>
-                  <a:srgbClr val="E8793A"/>
-                </a:solidFill>
-                <a:latin typeface="Nunito Sans"/>
-              </a:rPr>
-              <a:t>• </a:t>
-            </a:r>
-            <a:r>
-              <a:rPr sz="2800" b="0">
-                <a:solidFill>
-                  <a:srgbClr val="1F2A44"/>
-                </a:solidFill>
-                <a:latin typeface="Nunito Sans"/>
-              </a:rPr>
-              <a:t>Las más frecuentes tienen </a:t>
-            </a:r>
-            <a:r>
-              <a:rPr sz="2800" b="1">
-                <a:solidFill>
-                  <a:srgbClr val="1F2A44"/>
-                </a:solidFill>
-                <a:latin typeface="Nunito Sans"/>
-              </a:rPr>
-              <a:t>nombre</a:t>
+              <a:t>Premisa = razón, con un nombre más técnico</a:t>
             </a:r>
           </a:p>
         </p:txBody>
@@ -7023,7 +7096,7 @@
                 </a:solidFill>
                 <a:latin typeface="Nunito Sans"/>
               </a:rPr>
-              <a:t>BLOQUE 1 · QUÉ ES UNA FALACIA</a:t>
+              <a:t>BLOQUE 1 · LAS PARTES DE UN ARGUMENTO</a:t>
             </a:r>
           </a:p>
         </p:txBody>
@@ -7062,221 +7135,191 @@
                 </a:solidFill>
                 <a:latin typeface="Fredoka"/>
               </a:rPr>
-              <a:t>¿Dónde falla una falacia? (sesión 9)</a:t>
-            </a:r>
-          </a:p>
-        </p:txBody>
-      </p:sp>
-      <p:graphicFrame>
-        <p:nvGraphicFramePr>
-          <p:cNvPr id="4" name="Table 3"/>
-          <p:cNvGraphicFramePr>
-            <a:graphicFrameLocks noGrp="1"/>
-          </p:cNvGraphicFramePr>
+              <a:t>Indicadores</a:t>
+            </a:r>
+          </a:p>
+        </p:txBody>
+      </p:sp>
+      <p:sp>
+        <p:nvSpPr>
+          <p:cNvPr id="4" name="TextBox 3"/>
+          <p:cNvSpPr txBox="1"/>
           <p:nvPr/>
-        </p:nvGraphicFramePr>
-        <p:xfrm>
-          <a:off x="640000" y="1700000"/>
-          <a:ext cx="10912000" cy="2400000"/>
-        </p:xfrm>
-        <a:graphic>
-          <a:graphicData uri="http://schemas.openxmlformats.org/drawingml/2006/table">
-            <a:tbl>
-              <a:tblPr firstRow="1" bandRow="1">
-                <a:tableStyleId>{5C22544A-7EE6-4342-B048-85BDC9FD1C3A}</a:tableStyleId>
-              </a:tblPr>
-              <a:tblGrid>
-                <a:gridCol w="5456000"/>
-                <a:gridCol w="5456000"/>
-              </a:tblGrid>
-              <a:tr h="600000">
-                <a:tc>
-                  <a:txBody>
-                    <a:bodyPr/>
-                    <a:lstStyle/>
-                    <a:p>
-                      <a:r>
-                        <a:rPr sz="2000" b="1">
-                          <a:solidFill>
-                            <a:srgbClr val="FBF7EF"/>
-                          </a:solidFill>
-                          <a:latin typeface="Fredoka"/>
-                        </a:rPr>
-                        <a:t>Pregunta</a:t>
-                      </a:r>
-                    </a:p>
-                  </a:txBody>
-                  <a:tcPr>
-                    <a:solidFill>
-                      <a:srgbClr val="1F2A44"/>
-                    </a:solidFill>
-                  </a:tcPr>
-                </a:tc>
-                <a:tc>
-                  <a:txBody>
-                    <a:bodyPr/>
-                    <a:lstStyle/>
-                    <a:p>
-                      <a:r>
-                        <a:rPr sz="2000" b="1">
-                          <a:solidFill>
-                            <a:srgbClr val="FBF7EF"/>
-                          </a:solidFill>
-                          <a:latin typeface="Fredoka"/>
-                        </a:rPr>
-                        <a:t>Si falla…</a:t>
-                      </a:r>
-                    </a:p>
-                  </a:txBody>
-                  <a:tcPr>
-                    <a:solidFill>
-                      <a:srgbClr val="1F2A44"/>
-                    </a:solidFill>
-                  </a:tcPr>
-                </a:tc>
-              </a:tr>
-              <a:tr h="600000">
-                <a:tc>
-                  <a:txBody>
-                    <a:bodyPr/>
-                    <a:lstStyle/>
-                    <a:p>
-                      <a:r>
-                        <a:rPr sz="2000" b="1">
-                          <a:solidFill>
-                            <a:srgbClr val="1F2A44"/>
-                          </a:solidFill>
-                          <a:latin typeface="Nunito Sans"/>
-                        </a:rPr>
-                        <a:t>¿Es verdad?</a:t>
-                      </a:r>
-                    </a:p>
-                  </a:txBody>
-                  <a:tcPr>
-                    <a:solidFill>
-                      <a:srgbClr val="FFFFFF"/>
-                    </a:solidFill>
-                  </a:tcPr>
-                </a:tc>
-                <a:tc>
-                  <a:txBody>
-                    <a:bodyPr/>
-                    <a:lstStyle/>
-                    <a:p>
-                      <a:r>
-                        <a:rPr sz="2000" b="0">
-                          <a:solidFill>
-                            <a:srgbClr val="1F2A44"/>
-                          </a:solidFill>
-                          <a:latin typeface="Nunito Sans"/>
-                        </a:rPr>
-                        <a:t>Dato falso: argumento malo, pero no suele llamarse falacia</a:t>
-                      </a:r>
-                    </a:p>
-                  </a:txBody>
-                  <a:tcPr>
-                    <a:solidFill>
-                      <a:srgbClr val="FFFFFF"/>
-                    </a:solidFill>
-                  </a:tcPr>
-                </a:tc>
-              </a:tr>
-              <a:tr h="600000">
-                <a:tc>
-                  <a:txBody>
-                    <a:bodyPr/>
-                    <a:lstStyle/>
-                    <a:p>
-                      <a:r>
-                        <a:rPr sz="2000" b="1">
-                          <a:solidFill>
-                            <a:srgbClr val="1F2A44"/>
-                          </a:solidFill>
-                          <a:latin typeface="Nunito Sans"/>
-                        </a:rPr>
-                        <a:t>¿Viene a cuento?</a:t>
-                      </a:r>
-                    </a:p>
-                  </a:txBody>
-                  <a:tcPr>
-                    <a:solidFill>
-                      <a:srgbClr val="EAF0F7"/>
-                    </a:solidFill>
-                  </a:tcPr>
-                </a:tc>
-                <a:tc>
-                  <a:txBody>
-                    <a:bodyPr/>
-                    <a:lstStyle/>
-                    <a:p>
-                      <a:r>
-                        <a:rPr sz="2000" b="0">
-                          <a:solidFill>
-                            <a:srgbClr val="1F2A44"/>
-                          </a:solidFill>
-                          <a:latin typeface="Nunito Sans"/>
-                        </a:rPr>
-                        <a:t>Habla de otra cosa: aquí fallan muchas falacias</a:t>
-                      </a:r>
-                    </a:p>
-                  </a:txBody>
-                  <a:tcPr>
-                    <a:solidFill>
-                      <a:srgbClr val="EAF0F7"/>
-                    </a:solidFill>
-                  </a:tcPr>
-                </a:tc>
-              </a:tr>
-              <a:tr h="600000">
-                <a:tc>
-                  <a:txBody>
-                    <a:bodyPr/>
-                    <a:lstStyle/>
-                    <a:p>
-                      <a:r>
-                        <a:rPr sz="2000" b="1">
-                          <a:solidFill>
-                            <a:srgbClr val="1F2A44"/>
-                          </a:solidFill>
-                          <a:latin typeface="Nunito Sans"/>
-                        </a:rPr>
-                        <a:t>¿Es suficiente?</a:t>
-                      </a:r>
-                    </a:p>
-                  </a:txBody>
-                  <a:tcPr>
-                    <a:solidFill>
-                      <a:srgbClr val="FFFFFF"/>
-                    </a:solidFill>
-                  </a:tcPr>
-                </a:tc>
-                <a:tc>
-                  <a:txBody>
-                    <a:bodyPr/>
-                    <a:lstStyle/>
-                    <a:p>
-                      <a:r>
-                        <a:rPr sz="2000" b="0">
-                          <a:solidFill>
-                            <a:srgbClr val="1F2A44"/>
-                          </a:solidFill>
-                          <a:latin typeface="Nunito Sans"/>
-                        </a:rPr>
-                        <a:t>Poco para una conclusión tan grande: otra falacia típica</a:t>
-                      </a:r>
-                    </a:p>
-                  </a:txBody>
-                  <a:tcPr>
-                    <a:solidFill>
-                      <a:srgbClr val="FFFFFF"/>
-                    </a:solidFill>
-                  </a:tcPr>
-                </a:tc>
-              </a:tr>
-            </a:tbl>
-          </a:graphicData>
-        </a:graphic>
-      </p:graphicFrame>
+        </p:nvSpPr>
+        <p:spPr>
+          <a:xfrm>
+            <a:off x="840000" y="1730000"/>
+            <a:ext cx="10512000" cy="1000000"/>
+          </a:xfrm>
+          <a:prstGeom prst="rect">
+            <a:avLst/>
+          </a:prstGeom>
+          <a:noFill/>
+        </p:spPr>
+        <p:txBody>
+          <a:bodyPr wrap="square" anchor="ctr">
+            <a:spAutoFit/>
+          </a:bodyPr>
+          <a:lstStyle/>
+          <a:p>
+            <a:pPr>
+              <a:spcAft>
+                <a:spcPts val="1080"/>
+              </a:spcAft>
+            </a:pPr>
+            <a:r>
+              <a:rPr sz="2400" b="0">
+                <a:solidFill>
+                  <a:srgbClr val="1F2A44"/>
+                </a:solidFill>
+                <a:latin typeface="Nunito Sans"/>
+              </a:rPr>
+              <a:t>Los </a:t>
+            </a:r>
+            <a:r>
+              <a:rPr sz="2400" b="1">
+                <a:solidFill>
+                  <a:srgbClr val="1F2A44"/>
+                </a:solidFill>
+                <a:latin typeface="Nunito Sans"/>
+              </a:rPr>
+              <a:t>indicadores</a:t>
+            </a:r>
+            <a:r>
+              <a:rPr sz="2400" b="0">
+                <a:solidFill>
+                  <a:srgbClr val="1F2A44"/>
+                </a:solidFill>
+                <a:latin typeface="Nunito Sans"/>
+              </a:rPr>
+              <a:t> son palabras pista: nos dicen qué es cada parte.</a:t>
+            </a:r>
+          </a:p>
+        </p:txBody>
+      </p:sp>
+      <p:sp>
+        <p:nvSpPr>
+          <p:cNvPr id="5" name="TextBox 4"/>
+          <p:cNvSpPr txBox="1"/>
+          <p:nvPr/>
+        </p:nvSpPr>
+        <p:spPr>
+          <a:xfrm>
+            <a:off x="640000" y="3000000"/>
+            <a:ext cx="10912000" cy="3458000"/>
+          </a:xfrm>
+          <a:prstGeom prst="rect">
+            <a:avLst/>
+          </a:prstGeom>
+          <a:noFill/>
+        </p:spPr>
+        <p:txBody>
+          <a:bodyPr wrap="square">
+            <a:spAutoFit/>
+          </a:bodyPr>
+          <a:lstStyle/>
+          <a:p>
+            <a:pPr>
+              <a:spcAft>
+                <a:spcPts val="1260"/>
+              </a:spcAft>
+            </a:pPr>
+            <a:r>
+              <a:rPr sz="2800" b="1">
+                <a:solidFill>
+                  <a:srgbClr val="E8793A"/>
+                </a:solidFill>
+                <a:latin typeface="Nunito Sans"/>
+              </a:rPr>
+              <a:t>• </a:t>
+            </a:r>
+            <a:r>
+              <a:rPr sz="2800" b="0">
+                <a:solidFill>
+                  <a:srgbClr val="1F2A44"/>
+                </a:solidFill>
+                <a:latin typeface="Nunito Sans"/>
+              </a:rPr>
+              <a:t>Antes de una premisa: «porque», «ya que», «puesto que», «como»</a:t>
+            </a:r>
+          </a:p>
+          <a:p>
+            <a:pPr>
+              <a:spcAft>
+                <a:spcPts val="1260"/>
+              </a:spcAft>
+            </a:pPr>
+            <a:r>
+              <a:rPr sz="2800" b="1">
+                <a:solidFill>
+                  <a:srgbClr val="E8793A"/>
+                </a:solidFill>
+                <a:latin typeface="Nunito Sans"/>
+              </a:rPr>
+              <a:t>• </a:t>
+            </a:r>
+            <a:r>
+              <a:rPr sz="2800" b="0">
+                <a:solidFill>
+                  <a:srgbClr val="1F2A44"/>
+                </a:solidFill>
+                <a:latin typeface="Nunito Sans"/>
+              </a:rPr>
+              <a:t>Antes de una conclusión: «por tanto», «así que», «por eso», «luego»</a:t>
+            </a:r>
+          </a:p>
+          <a:p>
+            <a:pPr>
+              <a:spcAft>
+                <a:spcPts val="1260"/>
+              </a:spcAft>
+            </a:pPr>
+            <a:r>
+              <a:rPr sz="2800" b="1">
+                <a:solidFill>
+                  <a:srgbClr val="E8793A"/>
+                </a:solidFill>
+                <a:latin typeface="Nunito Sans"/>
+              </a:rPr>
+              <a:t>• </a:t>
+            </a:r>
+            <a:r>
+              <a:rPr sz="2800" b="0">
+                <a:solidFill>
+                  <a:srgbClr val="1F2A44"/>
+                </a:solidFill>
+                <a:latin typeface="Nunito Sans"/>
+              </a:rPr>
+              <a:t>A veces no hay indicador: hay que pensar qué apoya a qué</a:t>
+            </a:r>
+          </a:p>
+          <a:p>
+            <a:pPr>
+              <a:spcAft>
+                <a:spcPts val="1260"/>
+              </a:spcAft>
+            </a:pPr>
+            <a:r>
+              <a:rPr sz="2800" b="1">
+                <a:solidFill>
+                  <a:srgbClr val="E8793A"/>
+                </a:solidFill>
+                <a:latin typeface="Nunito Sans"/>
+              </a:rPr>
+              <a:t>• </a:t>
+            </a:r>
+            <a:r>
+              <a:rPr sz="2800" b="0">
+                <a:solidFill>
+                  <a:srgbClr val="1F2A44"/>
+                </a:solidFill>
+                <a:latin typeface="Nunito Sans"/>
+              </a:rPr>
+              <a:t>Ojo: «porque» a veces explica una causa, no da una razón</a:t>
+            </a:r>
+          </a:p>
+        </p:txBody>
+      </p:sp>
     </p:spTree>
   </p:cSld>
   <p:clrMapOvr>
@@ -7337,7 +7380,7 @@
                 </a:solidFill>
                 <a:latin typeface="Nunito Sans"/>
               </a:rPr>
-              <a:t>BLOQUE 1 · QUÉ ES UNA FALACIA</a:t>
+              <a:t>BLOQUE 1 · LAS PARTES DE UN ARGUMENTO</a:t>
             </a:r>
           </a:p>
         </p:txBody>
@@ -7376,7 +7419,410 @@
                 </a:solidFill>
                 <a:latin typeface="Fredoka"/>
               </a:rPr>
-              <a:t>Lo que es y lo que no es</a:t>
+              <a:t>Tres argumentos, separados</a:t>
+            </a:r>
+          </a:p>
+        </p:txBody>
+      </p:sp>
+      <p:graphicFrame>
+        <p:nvGraphicFramePr>
+          <p:cNvPr id="4" name="Table 3"/>
+          <p:cNvGraphicFramePr>
+            <a:graphicFrameLocks noGrp="1"/>
+          </p:cNvGraphicFramePr>
+          <p:nvPr/>
+        </p:nvGraphicFramePr>
+        <p:xfrm>
+          <a:off x="640000" y="1700000"/>
+          <a:ext cx="10912000" cy="2400000"/>
+        </p:xfrm>
+        <a:graphic>
+          <a:graphicData uri="http://schemas.openxmlformats.org/drawingml/2006/table">
+            <a:tbl>
+              <a:tblPr firstRow="1" bandRow="1">
+                <a:tableStyleId>{5C22544A-7EE6-4342-B048-85BDC9FD1C3A}</a:tableStyleId>
+              </a:tblPr>
+              <a:tblGrid>
+                <a:gridCol w="3637333"/>
+                <a:gridCol w="3637333"/>
+                <a:gridCol w="3637334"/>
+              </a:tblGrid>
+              <a:tr h="600000">
+                <a:tc>
+                  <a:txBody>
+                    <a:bodyPr/>
+                    <a:lstStyle/>
+                    <a:p>
+                      <a:r>
+                        <a:rPr sz="2000" b="1">
+                          <a:solidFill>
+                            <a:srgbClr val="FBF7EF"/>
+                          </a:solidFill>
+                          <a:latin typeface="Fredoka"/>
+                        </a:rPr>
+                        <a:t>Argumento</a:t>
+                      </a:r>
+                    </a:p>
+                  </a:txBody>
+                  <a:tcPr>
+                    <a:solidFill>
+                      <a:srgbClr val="1F2A44"/>
+                    </a:solidFill>
+                  </a:tcPr>
+                </a:tc>
+                <a:tc>
+                  <a:txBody>
+                    <a:bodyPr/>
+                    <a:lstStyle/>
+                    <a:p>
+                      <a:r>
+                        <a:rPr sz="2000" b="1">
+                          <a:solidFill>
+                            <a:srgbClr val="FBF7EF"/>
+                          </a:solidFill>
+                          <a:latin typeface="Fredoka"/>
+                        </a:rPr>
+                        <a:t>Premisa</a:t>
+                      </a:r>
+                    </a:p>
+                  </a:txBody>
+                  <a:tcPr>
+                    <a:solidFill>
+                      <a:srgbClr val="1F2A44"/>
+                    </a:solidFill>
+                  </a:tcPr>
+                </a:tc>
+                <a:tc>
+                  <a:txBody>
+                    <a:bodyPr/>
+                    <a:lstStyle/>
+                    <a:p>
+                      <a:r>
+                        <a:rPr sz="2000" b="1">
+                          <a:solidFill>
+                            <a:srgbClr val="FBF7EF"/>
+                          </a:solidFill>
+                          <a:latin typeface="Fredoka"/>
+                        </a:rPr>
+                        <a:t>Conclusión</a:t>
+                      </a:r>
+                    </a:p>
+                  </a:txBody>
+                  <a:tcPr>
+                    <a:solidFill>
+                      <a:srgbClr val="1F2A44"/>
+                    </a:solidFill>
+                  </a:tcPr>
+                </a:tc>
+              </a:tr>
+              <a:tr h="600000">
+                <a:tc>
+                  <a:txBody>
+                    <a:bodyPr/>
+                    <a:lstStyle/>
+                    <a:p>
+                      <a:r>
+                        <a:rPr sz="2000" b="0">
+                          <a:solidFill>
+                            <a:srgbClr val="1F2A44"/>
+                          </a:solidFill>
+                          <a:latin typeface="Nunito Sans"/>
+                        </a:rPr>
+                        <a:t>«Deberíamos ir en metro, porque hoy hay huelga de autobuses.»</a:t>
+                      </a:r>
+                    </a:p>
+                  </a:txBody>
+                  <a:tcPr>
+                    <a:solidFill>
+                      <a:srgbClr val="FFFFFF"/>
+                    </a:solidFill>
+                  </a:tcPr>
+                </a:tc>
+                <a:tc>
+                  <a:txBody>
+                    <a:bodyPr/>
+                    <a:lstStyle/>
+                    <a:p>
+                      <a:r>
+                        <a:rPr sz="2000" b="0">
+                          <a:solidFill>
+                            <a:srgbClr val="1F2A44"/>
+                          </a:solidFill>
+                          <a:latin typeface="Nunito Sans"/>
+                        </a:rPr>
+                        <a:t>Hoy hay huelga de autobuses.</a:t>
+                      </a:r>
+                    </a:p>
+                  </a:txBody>
+                  <a:tcPr>
+                    <a:solidFill>
+                      <a:srgbClr val="FFFFFF"/>
+                    </a:solidFill>
+                  </a:tcPr>
+                </a:tc>
+                <a:tc>
+                  <a:txBody>
+                    <a:bodyPr/>
+                    <a:lstStyle/>
+                    <a:p>
+                      <a:r>
+                        <a:rPr sz="2000" b="0">
+                          <a:solidFill>
+                            <a:srgbClr val="1F2A44"/>
+                          </a:solidFill>
+                          <a:latin typeface="Nunito Sans"/>
+                        </a:rPr>
+                        <a:t>Deberíamos ir en metro.</a:t>
+                      </a:r>
+                    </a:p>
+                  </a:txBody>
+                  <a:tcPr>
+                    <a:solidFill>
+                      <a:srgbClr val="FFFFFF"/>
+                    </a:solidFill>
+                  </a:tcPr>
+                </a:tc>
+              </a:tr>
+              <a:tr h="600000">
+                <a:tc>
+                  <a:txBody>
+                    <a:bodyPr/>
+                    <a:lstStyle/>
+                    <a:p>
+                      <a:r>
+                        <a:rPr sz="2000" b="0">
+                          <a:solidFill>
+                            <a:srgbClr val="1F2A44"/>
+                          </a:solidFill>
+                          <a:latin typeface="Nunito Sans"/>
+                        </a:rPr>
+                        <a:t>«Una chica paró tres penaltis, así que debería jugar de portera.»</a:t>
+                      </a:r>
+                    </a:p>
+                  </a:txBody>
+                  <a:tcPr>
+                    <a:solidFill>
+                      <a:srgbClr val="EAF0F7"/>
+                    </a:solidFill>
+                  </a:tcPr>
+                </a:tc>
+                <a:tc>
+                  <a:txBody>
+                    <a:bodyPr/>
+                    <a:lstStyle/>
+                    <a:p>
+                      <a:r>
+                        <a:rPr sz="2000" b="0">
+                          <a:solidFill>
+                            <a:srgbClr val="1F2A44"/>
+                          </a:solidFill>
+                          <a:latin typeface="Nunito Sans"/>
+                        </a:rPr>
+                        <a:t>Paró tres penaltis.</a:t>
+                      </a:r>
+                    </a:p>
+                  </a:txBody>
+                  <a:tcPr>
+                    <a:solidFill>
+                      <a:srgbClr val="EAF0F7"/>
+                    </a:solidFill>
+                  </a:tcPr>
+                </a:tc>
+                <a:tc>
+                  <a:txBody>
+                    <a:bodyPr/>
+                    <a:lstStyle/>
+                    <a:p>
+                      <a:r>
+                        <a:rPr sz="2000" b="0">
+                          <a:solidFill>
+                            <a:srgbClr val="1F2A44"/>
+                          </a:solidFill>
+                          <a:latin typeface="Nunito Sans"/>
+                        </a:rPr>
+                        <a:t>Debería jugar de portera.</a:t>
+                      </a:r>
+                    </a:p>
+                  </a:txBody>
+                  <a:tcPr>
+                    <a:solidFill>
+                      <a:srgbClr val="EAF0F7"/>
+                    </a:solidFill>
+                  </a:tcPr>
+                </a:tc>
+              </a:tr>
+              <a:tr h="600000">
+                <a:tc>
+                  <a:txBody>
+                    <a:bodyPr/>
+                    <a:lstStyle/>
+                    <a:p>
+                      <a:r>
+                        <a:rPr sz="2000" b="0">
+                          <a:solidFill>
+                            <a:srgbClr val="1F2A44"/>
+                          </a:solidFill>
+                          <a:latin typeface="Nunito Sans"/>
+                        </a:rPr>
+                        <a:t>«No compres esas zapatillas: cuestan 120 euros y tienes otras.»</a:t>
+                      </a:r>
+                    </a:p>
+                  </a:txBody>
+                  <a:tcPr>
+                    <a:solidFill>
+                      <a:srgbClr val="FFFFFF"/>
+                    </a:solidFill>
+                  </a:tcPr>
+                </a:tc>
+                <a:tc>
+                  <a:txBody>
+                    <a:bodyPr/>
+                    <a:lstStyle/>
+                    <a:p>
+                      <a:r>
+                        <a:rPr sz="2000" b="0">
+                          <a:solidFill>
+                            <a:srgbClr val="1F2A44"/>
+                          </a:solidFill>
+                          <a:latin typeface="Nunito Sans"/>
+                        </a:rPr>
+                        <a:t>Cuestan 120 euros. Tienes otras.</a:t>
+                      </a:r>
+                    </a:p>
+                  </a:txBody>
+                  <a:tcPr>
+                    <a:solidFill>
+                      <a:srgbClr val="FFFFFF"/>
+                    </a:solidFill>
+                  </a:tcPr>
+                </a:tc>
+                <a:tc>
+                  <a:txBody>
+                    <a:bodyPr/>
+                    <a:lstStyle/>
+                    <a:p>
+                      <a:r>
+                        <a:rPr sz="2000" b="0">
+                          <a:solidFill>
+                            <a:srgbClr val="1F2A44"/>
+                          </a:solidFill>
+                          <a:latin typeface="Nunito Sans"/>
+                        </a:rPr>
+                        <a:t>No compres esas zapatillas.</a:t>
+                      </a:r>
+                    </a:p>
+                  </a:txBody>
+                  <a:tcPr>
+                    <a:solidFill>
+                      <a:srgbClr val="FFFFFF"/>
+                    </a:solidFill>
+                  </a:tcPr>
+                </a:tc>
+              </a:tr>
+            </a:tbl>
+          </a:graphicData>
+        </a:graphic>
+      </p:graphicFrame>
+    </p:spTree>
+  </p:cSld>
+  <p:clrMapOvr>
+    <a:masterClrMapping/>
+  </p:clrMapOvr>
+</p:sld>
+</file>
+
+<file path=ppt/slides/slide9.xml><?xml version="1.0" encoding="utf-8"?>
+<p:sld xmlns:a="http://schemas.openxmlformats.org/drawingml/2006/main" xmlns:p="http://schemas.openxmlformats.org/presentationml/2006/main" xmlns:r="http://schemas.openxmlformats.org/officeDocument/2006/relationships">
+  <p:cSld>
+    <p:bg>
+      <p:bgPr>
+        <a:solidFill>
+          <a:srgbClr val="FBF7EF"/>
+        </a:solidFill>
+        <a:effectLst/>
+      </p:bgPr>
+    </p:bg>
+    <p:spTree>
+      <p:nvGrpSpPr>
+        <p:cNvPr id="1" name=""/>
+        <p:cNvGrpSpPr/>
+        <p:nvPr/>
+      </p:nvGrpSpPr>
+      <p:grpSpPr/>
+      <p:sp>
+        <p:nvSpPr>
+          <p:cNvPr id="2" name="TextBox 1"/>
+          <p:cNvSpPr txBox="1"/>
+          <p:nvPr/>
+        </p:nvSpPr>
+        <p:spPr>
+          <a:xfrm>
+            <a:off x="640000" y="380000"/>
+            <a:ext cx="10912000" cy="420000"/>
+          </a:xfrm>
+          <a:prstGeom prst="rect">
+            <a:avLst/>
+          </a:prstGeom>
+          <a:noFill/>
+        </p:spPr>
+        <p:txBody>
+          <a:bodyPr wrap="square">
+            <a:spAutoFit/>
+          </a:bodyPr>
+          <a:lstStyle/>
+          <a:p>
+            <a:pPr>
+              <a:spcAft>
+                <a:spcPts val="630"/>
+              </a:spcAft>
+            </a:pPr>
+            <a:r>
+              <a:rPr sz="1400" b="1">
+                <a:solidFill>
+                  <a:srgbClr val="E8793A"/>
+                </a:solidFill>
+                <a:latin typeface="Nunito Sans"/>
+              </a:rPr>
+              <a:t>BLOQUE 1 · LAS PARTES DE UN ARGUMENTO</a:t>
+            </a:r>
+          </a:p>
+        </p:txBody>
+      </p:sp>
+      <p:sp>
+        <p:nvSpPr>
+          <p:cNvPr id="3" name="TextBox 2"/>
+          <p:cNvSpPr txBox="1"/>
+          <p:nvPr/>
+        </p:nvSpPr>
+        <p:spPr>
+          <a:xfrm>
+            <a:off x="640000" y="760000"/>
+            <a:ext cx="10912000" cy="800000"/>
+          </a:xfrm>
+          <a:prstGeom prst="rect">
+            <a:avLst/>
+          </a:prstGeom>
+          <a:noFill/>
+        </p:spPr>
+        <p:txBody>
+          <a:bodyPr wrap="square">
+            <a:spAutoFit/>
+          </a:bodyPr>
+          <a:lstStyle/>
+          <a:p>
+            <a:pPr>
+              <a:spcAft>
+                <a:spcPts val="1710"/>
+              </a:spcAft>
+            </a:pPr>
+            <a:r>
+              <a:rPr sz="3800" b="1">
+                <a:solidFill>
+                  <a:srgbClr val="1F2A44"/>
+                </a:solidFill>
+                <a:latin typeface="Fredoka"/>
+              </a:rPr>
+              <a:t>¿Es un argumento?</a:t>
             </a:r>
           </a:p>
         </p:txBody>
@@ -7458,7 +7904,7 @@
                 </a:solidFill>
                 <a:latin typeface="Nunito Sans"/>
               </a:rPr>
-              <a:t>No es falacia</a:t>
+              <a:t>No es un argumento</a:t>
             </a:r>
           </a:p>
         </p:txBody>
@@ -7506,7 +7952,7 @@
                 </a:solidFill>
                 <a:latin typeface="Nunito Sans"/>
               </a:rPr>
-              <a:t>Una opinión con la que no estoy de acuerdo</a:t>
+              <a:t>Una orden sola: «¡Cállate!»</a:t>
             </a:r>
           </a:p>
           <a:p>
@@ -7531,7 +7977,7 @@
                 </a:solidFill>
                 <a:latin typeface="Nunito Sans"/>
               </a:rPr>
-              <a:t>Una frase falsa, sin más</a:t>
+              <a:t>Una opinión sin razones: «El fútbol es lo mejor»</a:t>
             </a:r>
           </a:p>
           <a:p>
@@ -7556,7 +8002,32 @@
                 </a:solidFill>
                 <a:latin typeface="Nunito Sans"/>
               </a:rPr>
-              <a:t>Cualquier argumento que no me convence</a:t>
+              <a:t>Una pregunta: «¿Vienes al cine?»</a:t>
+            </a:r>
+          </a:p>
+          <a:p>
+            <a:pPr>
+              <a:spcAft>
+                <a:spcPts val="1170"/>
+              </a:spcAft>
+            </a:pPr>
+            <a:r>
+              <a:rPr sz="2600" b="1">
+                <a:solidFill>
+                  <a:srgbClr val="E8793A"/>
+                </a:solidFill>
+                <a:latin typeface="Nunito Sans"/>
+              </a:rPr>
+              <a:t>• </a:t>
+            </a:r>
+            <a:r>
+              <a:rPr sz="2600" b="0">
+                <a:solidFill>
+                  <a:srgbClr val="1F2A44"/>
+                </a:solidFill>
+                <a:latin typeface="Nunito Sans"/>
+              </a:rPr>
+              <a:t>Datos sueltos, sin conclusión</a:t>
             </a:r>
           </a:p>
         </p:txBody>
@@ -7638,7 +8109,7 @@
                 </a:solidFill>
                 <a:latin typeface="Nunito Sans"/>
               </a:rPr>
-              <a:t>Sí es falacia</a:t>
+              <a:t>Sí es un argumento</a:t>
             </a:r>
           </a:p>
         </p:txBody>
@@ -7686,7 +8157,7 @@
                 </a:solidFill>
                 <a:latin typeface="Nunito Sans"/>
               </a:rPr>
-              <a:t>Un argumento con un fallo escondido</a:t>
+              <a:t>Hay algo que se quiere probar: la conclusión</a:t>
             </a:r>
           </a:p>
           <a:p>
@@ -7711,7 +8182,7 @@
                 </a:solidFill>
                 <a:latin typeface="Nunito Sans"/>
               </a:rPr>
-              <a:t>Unas razones que no llevan a la conclusión</a:t>
+              <a:t>Hay al menos una razón que lo apoya: una premisa</a:t>
             </a:r>
           </a:p>
           <a:p>
@@ -7736,111 +8207,7 @@
                 </a:solidFill>
                 <a:latin typeface="Nunito Sans"/>
               </a:rPr>
-              <a:t>Un truco que se puede nombrar y desmontar</a:t>
-            </a:r>
-          </a:p>
-        </p:txBody>
-      </p:sp>
-    </p:spTree>
-  </p:cSld>
-  <p:clrMapOvr>
-    <a:masterClrMapping/>
-  </p:clrMapOvr>
-</p:sld>
-</file>
-
-<file path=ppt/slides/slide9.xml><?xml version="1.0" encoding="utf-8"?>
-<p:sld xmlns:a="http://schemas.openxmlformats.org/drawingml/2006/main" xmlns:p="http://schemas.openxmlformats.org/presentationml/2006/main" xmlns:r="http://schemas.openxmlformats.org/officeDocument/2006/relationships">
-  <p:cSld>
-    <p:bg>
-      <p:bgPr>
-        <a:solidFill>
-          <a:srgbClr val="1F2A44"/>
-        </a:solidFill>
-        <a:effectLst/>
-      </p:bgPr>
-    </p:bg>
-    <p:spTree>
-      <p:nvGrpSpPr>
-        <p:cNvPr id="1" name=""/>
-        <p:cNvGrpSpPr/>
-        <p:nvPr/>
-      </p:nvGrpSpPr>
-      <p:grpSpPr/>
-      <p:sp>
-        <p:nvSpPr>
-          <p:cNvPr id="2" name="TextBox 1"/>
-          <p:cNvSpPr txBox="1"/>
-          <p:nvPr/>
-        </p:nvSpPr>
-        <p:spPr>
-          <a:xfrm>
-            <a:off x="640000" y="2300000"/>
-            <a:ext cx="10912000" cy="500000"/>
-          </a:xfrm>
-          <a:prstGeom prst="rect">
-            <a:avLst/>
-          </a:prstGeom>
-          <a:noFill/>
-        </p:spPr>
-        <p:txBody>
-          <a:bodyPr wrap="square">
-            <a:spAutoFit/>
-          </a:bodyPr>
-          <a:lstStyle/>
-          <a:p>
-            <a:pPr>
-              <a:spcAft>
-                <a:spcPts val="810"/>
-              </a:spcAft>
-            </a:pPr>
-            <a:r>
-              <a:rPr sz="1800" b="1">
-                <a:solidFill>
-                  <a:srgbClr val="F4B183"/>
-                </a:solidFill>
-                <a:latin typeface="Nunito Sans"/>
-              </a:rPr>
-              <a:t>BLOQUE 2</a:t>
-            </a:r>
-          </a:p>
-        </p:txBody>
-      </p:sp>
-      <p:sp>
-        <p:nvSpPr>
-          <p:cNvPr id="3" name="TextBox 2"/>
-          <p:cNvSpPr txBox="1"/>
-          <p:nvPr/>
-        </p:nvSpPr>
-        <p:spPr>
-          <a:xfrm>
-            <a:off x="640000" y="2800000"/>
-            <a:ext cx="10912000" cy="800000"/>
-          </a:xfrm>
-          <a:prstGeom prst="rect">
-            <a:avLst/>
-          </a:prstGeom>
-          <a:noFill/>
-        </p:spPr>
-        <p:txBody>
-          <a:bodyPr wrap="square">
-            <a:spAutoFit/>
-          </a:bodyPr>
-          <a:lstStyle/>
-          <a:p>
-            <a:pPr>
-              <a:spcAft>
-                <a:spcPts val="2160"/>
-              </a:spcAft>
-            </a:pPr>
-            <a:r>
-              <a:rPr sz="4800" b="1">
-                <a:solidFill>
-                  <a:srgbClr val="FBF7EF"/>
-                </a:solidFill>
-                <a:latin typeface="Fredoka"/>
-              </a:rPr>
-              <a:t>Casos resueltos</a:t>
+              <a:t>«Ven al cine hoy: la peli la quitan mañana»</a:t>
             </a:r>
           </a:p>
         </p:txBody>
